--- a/Document/図作成用.pptx
+++ b/Document/図作成用.pptx
@@ -7,6 +7,9 @@
   <p:sldIdLst>
     <p:sldId id="256" r:id="rId2"/>
     <p:sldId id="257" r:id="rId3"/>
+    <p:sldId id="258" r:id="rId4"/>
+    <p:sldId id="259" r:id="rId5"/>
+    <p:sldId id="260" r:id="rId6"/>
   </p:sldIdLst>
   <p:sldSz cx="12192000" cy="6858000"/>
   <p:notesSz cx="6858000" cy="9144000"/>
@@ -271,7 +274,7 @@
           <a:p>
             <a:fld id="{19E9E37B-3E14-47AE-8FD5-8C451C00E2CF}" type="datetimeFigureOut">
               <a:rPr kumimoji="1" lang="ja-JP" altLang="en-US" smtClean="0"/>
-              <a:t>2025/6/3</a:t>
+              <a:t>2026/1/7</a:t>
             </a:fld>
             <a:endParaRPr kumimoji="1" lang="ja-JP" altLang="en-US"/>
           </a:p>
@@ -517,7 +520,7 @@
           <a:p>
             <a:fld id="{19E9E37B-3E14-47AE-8FD5-8C451C00E2CF}" type="datetimeFigureOut">
               <a:rPr kumimoji="1" lang="ja-JP" altLang="en-US" smtClean="0"/>
-              <a:t>2025/6/3</a:t>
+              <a:t>2026/1/7</a:t>
             </a:fld>
             <a:endParaRPr kumimoji="1" lang="ja-JP" altLang="en-US"/>
           </a:p>
@@ -757,7 +760,7 @@
           <a:p>
             <a:fld id="{19E9E37B-3E14-47AE-8FD5-8C451C00E2CF}" type="datetimeFigureOut">
               <a:rPr kumimoji="1" lang="ja-JP" altLang="en-US" smtClean="0"/>
-              <a:t>2025/6/3</a:t>
+              <a:t>2026/1/7</a:t>
             </a:fld>
             <a:endParaRPr kumimoji="1" lang="ja-JP" altLang="en-US"/>
           </a:p>
@@ -987,7 +990,7 @@
           <a:p>
             <a:fld id="{19E9E37B-3E14-47AE-8FD5-8C451C00E2CF}" type="datetimeFigureOut">
               <a:rPr kumimoji="1" lang="ja-JP" altLang="en-US" smtClean="0"/>
-              <a:t>2025/6/3</a:t>
+              <a:t>2026/1/7</a:t>
             </a:fld>
             <a:endParaRPr kumimoji="1" lang="ja-JP" altLang="en-US"/>
           </a:p>
@@ -1262,7 +1265,7 @@
           <a:p>
             <a:fld id="{19E9E37B-3E14-47AE-8FD5-8C451C00E2CF}" type="datetimeFigureOut">
               <a:rPr kumimoji="1" lang="ja-JP" altLang="en-US" smtClean="0"/>
-              <a:t>2025/6/3</a:t>
+              <a:t>2026/1/7</a:t>
             </a:fld>
             <a:endParaRPr kumimoji="1" lang="ja-JP" altLang="en-US"/>
           </a:p>
@@ -1591,7 +1594,7 @@
           <a:p>
             <a:fld id="{19E9E37B-3E14-47AE-8FD5-8C451C00E2CF}" type="datetimeFigureOut">
               <a:rPr kumimoji="1" lang="ja-JP" altLang="en-US" smtClean="0"/>
-              <a:t>2025/6/3</a:t>
+              <a:t>2026/1/7</a:t>
             </a:fld>
             <a:endParaRPr kumimoji="1" lang="ja-JP" altLang="en-US"/>
           </a:p>
@@ -2067,7 +2070,7 @@
           <a:p>
             <a:fld id="{19E9E37B-3E14-47AE-8FD5-8C451C00E2CF}" type="datetimeFigureOut">
               <a:rPr kumimoji="1" lang="ja-JP" altLang="en-US" smtClean="0"/>
-              <a:t>2025/6/3</a:t>
+              <a:t>2026/1/7</a:t>
             </a:fld>
             <a:endParaRPr kumimoji="1" lang="ja-JP" altLang="en-US"/>
           </a:p>
@@ -2208,7 +2211,7 @@
           <a:p>
             <a:fld id="{19E9E37B-3E14-47AE-8FD5-8C451C00E2CF}" type="datetimeFigureOut">
               <a:rPr kumimoji="1" lang="ja-JP" altLang="en-US" smtClean="0"/>
-              <a:t>2025/6/3</a:t>
+              <a:t>2026/1/7</a:t>
             </a:fld>
             <a:endParaRPr kumimoji="1" lang="ja-JP" altLang="en-US"/>
           </a:p>
@@ -2321,7 +2324,7 @@
           <a:p>
             <a:fld id="{19E9E37B-3E14-47AE-8FD5-8C451C00E2CF}" type="datetimeFigureOut">
               <a:rPr kumimoji="1" lang="ja-JP" altLang="en-US" smtClean="0"/>
-              <a:t>2025/6/3</a:t>
+              <a:t>2026/1/7</a:t>
             </a:fld>
             <a:endParaRPr kumimoji="1" lang="ja-JP" altLang="en-US"/>
           </a:p>
@@ -2664,7 +2667,7 @@
           <a:p>
             <a:fld id="{19E9E37B-3E14-47AE-8FD5-8C451C00E2CF}" type="datetimeFigureOut">
               <a:rPr kumimoji="1" lang="ja-JP" altLang="en-US" smtClean="0"/>
-              <a:t>2025/6/3</a:t>
+              <a:t>2026/1/7</a:t>
             </a:fld>
             <a:endParaRPr kumimoji="1" lang="ja-JP" altLang="en-US"/>
           </a:p>
@@ -2952,7 +2955,7 @@
           <a:p>
             <a:fld id="{19E9E37B-3E14-47AE-8FD5-8C451C00E2CF}" type="datetimeFigureOut">
               <a:rPr kumimoji="1" lang="ja-JP" altLang="en-US" smtClean="0"/>
-              <a:t>2025/6/3</a:t>
+              <a:t>2026/1/7</a:t>
             </a:fld>
             <a:endParaRPr kumimoji="1" lang="ja-JP" altLang="en-US"/>
           </a:p>
@@ -3225,7 +3228,7 @@
           <a:p>
             <a:fld id="{19E9E37B-3E14-47AE-8FD5-8C451C00E2CF}" type="datetimeFigureOut">
               <a:rPr kumimoji="1" lang="ja-JP" altLang="en-US" smtClean="0"/>
-              <a:t>2025/6/3</a:t>
+              <a:t>2026/1/7</a:t>
             </a:fld>
             <a:endParaRPr kumimoji="1" lang="ja-JP" altLang="en-US"/>
           </a:p>
@@ -4437,6 +4440,2894 @@
 </p:sld>
 </file>
 
+<file path=ppt/slides/slide3.xml><?xml version="1.0" encoding="utf-8"?>
+<p:sld xmlns:a="http://schemas.openxmlformats.org/drawingml/2006/main" xmlns:r="http://schemas.openxmlformats.org/officeDocument/2006/relationships" xmlns:p="http://schemas.openxmlformats.org/presentationml/2006/main">
+  <p:cSld>
+    <p:spTree>
+      <p:nvGrpSpPr>
+        <p:cNvPr id="1" name=""/>
+        <p:cNvGrpSpPr/>
+        <p:nvPr/>
+      </p:nvGrpSpPr>
+      <p:grpSpPr>
+        <a:xfrm>
+          <a:off x="0" y="0"/>
+          <a:ext cx="0" cy="0"/>
+          <a:chOff x="0" y="0"/>
+          <a:chExt cx="0" cy="0"/>
+        </a:xfrm>
+      </p:grpSpPr>
+      <p:pic>
+        <p:nvPicPr>
+          <p:cNvPr id="4" name="図 3" descr="グラフィカル ユーザー インターフェイス が含まれている画像&#10;&#10;AI 生成コンテンツは誤りを含む可能性があります。">
+            <a:extLst>
+              <a:ext uri="{FF2B5EF4-FFF2-40B4-BE49-F238E27FC236}">
+                <a16:creationId xmlns:a16="http://schemas.microsoft.com/office/drawing/2014/main" id="{374670DD-0053-1874-4481-CE8E78F36D71}"/>
+              </a:ext>
+            </a:extLst>
+          </p:cNvPr>
+          <p:cNvPicPr>
+            <a:picLocks noGrp="1" noRot="1" noChangeAspect="1" noMove="1" noResize="1" noEditPoints="1" noAdjustHandles="1" noChangeArrowheads="1" noChangeShapeType="1" noCrop="1"/>
+          </p:cNvPicPr>
+          <p:nvPr/>
+        </p:nvPicPr>
+        <p:blipFill>
+          <a:blip r:embed="rId2">
+            <a:extLst>
+              <a:ext uri="{28A0092B-C50C-407E-A947-70E740481C1C}">
+                <a14:useLocalDpi xmlns:a14="http://schemas.microsoft.com/office/drawing/2010/main" val="0"/>
+              </a:ext>
+            </a:extLst>
+          </a:blip>
+          <a:stretch>
+            <a:fillRect/>
+          </a:stretch>
+        </p:blipFill>
+        <p:spPr>
+          <a:xfrm>
+            <a:off x="2667000" y="0"/>
+            <a:ext cx="6858000" cy="6858000"/>
+          </a:xfrm>
+          <a:prstGeom prst="rect">
+            <a:avLst/>
+          </a:prstGeom>
+        </p:spPr>
+      </p:pic>
+      <p:cxnSp>
+        <p:nvCxnSpPr>
+          <p:cNvPr id="5" name="直線コネクタ 4">
+            <a:extLst>
+              <a:ext uri="{FF2B5EF4-FFF2-40B4-BE49-F238E27FC236}">
+                <a16:creationId xmlns:a16="http://schemas.microsoft.com/office/drawing/2014/main" id="{23AF98F3-71B3-90CE-0888-7FDD5EF0E11C}"/>
+              </a:ext>
+            </a:extLst>
+          </p:cNvPr>
+          <p:cNvCxnSpPr>
+            <a:cxnSpLocks/>
+            <a:endCxn id="6" idx="3"/>
+          </p:cNvCxnSpPr>
+          <p:nvPr/>
+        </p:nvCxnSpPr>
+        <p:spPr>
+          <a:xfrm flipH="1" flipV="1">
+            <a:off x="4168442" y="605831"/>
+            <a:ext cx="553577" cy="365719"/>
+          </a:xfrm>
+          <a:prstGeom prst="line">
+            <a:avLst/>
+          </a:prstGeom>
+          <a:ln w="50800" cap="rnd">
+            <a:solidFill>
+              <a:schemeClr val="tx1"/>
+            </a:solidFill>
+            <a:round/>
+            <a:headEnd type="oval"/>
+            <a:tailEnd type="none"/>
+          </a:ln>
+        </p:spPr>
+        <p:style>
+          <a:lnRef idx="2">
+            <a:schemeClr val="accent1"/>
+          </a:lnRef>
+          <a:fillRef idx="0">
+            <a:schemeClr val="accent1"/>
+          </a:fillRef>
+          <a:effectRef idx="1">
+            <a:schemeClr val="accent1"/>
+          </a:effectRef>
+          <a:fontRef idx="minor">
+            <a:schemeClr val="tx1"/>
+          </a:fontRef>
+        </p:style>
+      </p:cxnSp>
+      <p:sp>
+        <p:nvSpPr>
+          <p:cNvPr id="6" name="テキスト ボックス 5">
+            <a:extLst>
+              <a:ext uri="{FF2B5EF4-FFF2-40B4-BE49-F238E27FC236}">
+                <a16:creationId xmlns:a16="http://schemas.microsoft.com/office/drawing/2014/main" id="{AB3ED580-152C-7864-978C-995DF78A8AA6}"/>
+              </a:ext>
+            </a:extLst>
+          </p:cNvPr>
+          <p:cNvSpPr txBox="1"/>
+          <p:nvPr/>
+        </p:nvSpPr>
+        <p:spPr>
+          <a:xfrm>
+            <a:off x="1878805" y="374998"/>
+            <a:ext cx="2289637" cy="461665"/>
+          </a:xfrm>
+          <a:prstGeom prst="rect">
+            <a:avLst/>
+          </a:prstGeom>
+          <a:noFill/>
+        </p:spPr>
+        <p:txBody>
+          <a:bodyPr wrap="square" rtlCol="0">
+            <a:spAutoFit/>
+          </a:bodyPr>
+          <a:lstStyle/>
+          <a:p>
+            <a:pPr algn="ctr"/>
+            <a:r>
+              <a:rPr lang="ja-JP" altLang="en-US" sz="2400" dirty="0"/>
+              <a:t>外部電源入力</a:t>
+            </a:r>
+            <a:endParaRPr kumimoji="1" lang="ja-JP" altLang="en-US" sz="2400" dirty="0"/>
+          </a:p>
+        </p:txBody>
+      </p:sp>
+      <p:cxnSp>
+        <p:nvCxnSpPr>
+          <p:cNvPr id="7" name="直線コネクタ 6">
+            <a:extLst>
+              <a:ext uri="{FF2B5EF4-FFF2-40B4-BE49-F238E27FC236}">
+                <a16:creationId xmlns:a16="http://schemas.microsoft.com/office/drawing/2014/main" id="{B0CBF25D-F3DE-F92D-AD95-689958073876}"/>
+              </a:ext>
+            </a:extLst>
+          </p:cNvPr>
+          <p:cNvCxnSpPr>
+            <a:cxnSpLocks/>
+            <a:endCxn id="8" idx="3"/>
+          </p:cNvCxnSpPr>
+          <p:nvPr/>
+        </p:nvCxnSpPr>
+        <p:spPr>
+          <a:xfrm flipH="1">
+            <a:off x="4722019" y="5822156"/>
+            <a:ext cx="328612" cy="430013"/>
+          </a:xfrm>
+          <a:prstGeom prst="line">
+            <a:avLst/>
+          </a:prstGeom>
+          <a:ln w="50800" cap="rnd">
+            <a:solidFill>
+              <a:schemeClr val="tx1"/>
+            </a:solidFill>
+            <a:round/>
+            <a:headEnd type="oval"/>
+            <a:tailEnd type="none"/>
+          </a:ln>
+        </p:spPr>
+        <p:style>
+          <a:lnRef idx="2">
+            <a:schemeClr val="accent1"/>
+          </a:lnRef>
+          <a:fillRef idx="0">
+            <a:schemeClr val="accent1"/>
+          </a:fillRef>
+          <a:effectRef idx="1">
+            <a:schemeClr val="accent1"/>
+          </a:effectRef>
+          <a:fontRef idx="minor">
+            <a:schemeClr val="tx1"/>
+          </a:fontRef>
+        </p:style>
+      </p:cxnSp>
+      <p:sp>
+        <p:nvSpPr>
+          <p:cNvPr id="8" name="テキスト ボックス 7">
+            <a:extLst>
+              <a:ext uri="{FF2B5EF4-FFF2-40B4-BE49-F238E27FC236}">
+                <a16:creationId xmlns:a16="http://schemas.microsoft.com/office/drawing/2014/main" id="{F4BC2666-36D2-B907-481D-D34A5504CF36}"/>
+              </a:ext>
+            </a:extLst>
+          </p:cNvPr>
+          <p:cNvSpPr txBox="1"/>
+          <p:nvPr/>
+        </p:nvSpPr>
+        <p:spPr>
+          <a:xfrm>
+            <a:off x="2563048" y="6021336"/>
+            <a:ext cx="2158971" cy="461665"/>
+          </a:xfrm>
+          <a:prstGeom prst="rect">
+            <a:avLst/>
+          </a:prstGeom>
+          <a:noFill/>
+        </p:spPr>
+        <p:txBody>
+          <a:bodyPr wrap="square" rtlCol="0">
+            <a:spAutoFit/>
+          </a:bodyPr>
+          <a:lstStyle/>
+          <a:p>
+            <a:pPr algn="ctr"/>
+            <a:r>
+              <a:rPr lang="ja-JP" altLang="en-US" sz="2400" dirty="0"/>
+              <a:t>内部電源</a:t>
+            </a:r>
+            <a:r>
+              <a:rPr kumimoji="1" lang="ja-JP" altLang="en-US" sz="2400" dirty="0"/>
+              <a:t>入力</a:t>
+            </a:r>
+          </a:p>
+        </p:txBody>
+      </p:sp>
+      <p:sp>
+        <p:nvSpPr>
+          <p:cNvPr id="18" name="テキスト ボックス 17">
+            <a:extLst>
+              <a:ext uri="{FF2B5EF4-FFF2-40B4-BE49-F238E27FC236}">
+                <a16:creationId xmlns:a16="http://schemas.microsoft.com/office/drawing/2014/main" id="{80C9FEC5-89DA-452C-5C5E-21498966E5A2}"/>
+              </a:ext>
+            </a:extLst>
+          </p:cNvPr>
+          <p:cNvSpPr txBox="1"/>
+          <p:nvPr/>
+        </p:nvSpPr>
+        <p:spPr>
+          <a:xfrm>
+            <a:off x="450056" y="914400"/>
+            <a:ext cx="2393157" cy="461665"/>
+          </a:xfrm>
+          <a:prstGeom prst="rect">
+            <a:avLst/>
+          </a:prstGeom>
+          <a:noFill/>
+        </p:spPr>
+        <p:txBody>
+          <a:bodyPr wrap="square" rtlCol="0">
+            <a:spAutoFit/>
+          </a:bodyPr>
+          <a:lstStyle/>
+          <a:p>
+            <a:pPr algn="ctr"/>
+            <a:r>
+              <a:rPr lang="ja-JP" altLang="en-US" sz="2400" dirty="0"/>
+              <a:t>外部電源入力時</a:t>
+            </a:r>
+            <a:endParaRPr kumimoji="1" lang="ja-JP" altLang="en-US" sz="2400" dirty="0"/>
+          </a:p>
+        </p:txBody>
+      </p:sp>
+      <p:cxnSp>
+        <p:nvCxnSpPr>
+          <p:cNvPr id="20" name="直線コネクタ 19">
+            <a:extLst>
+              <a:ext uri="{FF2B5EF4-FFF2-40B4-BE49-F238E27FC236}">
+                <a16:creationId xmlns:a16="http://schemas.microsoft.com/office/drawing/2014/main" id="{C8E2A2A9-C245-FFF9-EE77-8A66FFBBECE9}"/>
+              </a:ext>
+            </a:extLst>
+          </p:cNvPr>
+          <p:cNvCxnSpPr>
+            <a:cxnSpLocks/>
+          </p:cNvCxnSpPr>
+          <p:nvPr/>
+        </p:nvCxnSpPr>
+        <p:spPr>
+          <a:xfrm>
+            <a:off x="450056" y="1380531"/>
+            <a:ext cx="2571750" cy="0"/>
+          </a:xfrm>
+          <a:prstGeom prst="line">
+            <a:avLst/>
+          </a:prstGeom>
+          <a:ln w="38100"/>
+        </p:spPr>
+        <p:style>
+          <a:lnRef idx="2">
+            <a:schemeClr val="accent6"/>
+          </a:lnRef>
+          <a:fillRef idx="0">
+            <a:schemeClr val="accent6"/>
+          </a:fillRef>
+          <a:effectRef idx="1">
+            <a:schemeClr val="accent6"/>
+          </a:effectRef>
+          <a:fontRef idx="minor">
+            <a:schemeClr val="tx1"/>
+          </a:fontRef>
+        </p:style>
+      </p:cxnSp>
+      <p:cxnSp>
+        <p:nvCxnSpPr>
+          <p:cNvPr id="27" name="直線コネクタ 26">
+            <a:extLst>
+              <a:ext uri="{FF2B5EF4-FFF2-40B4-BE49-F238E27FC236}">
+                <a16:creationId xmlns:a16="http://schemas.microsoft.com/office/drawing/2014/main" id="{3E4CC8AA-8116-9C49-D913-752679B035AF}"/>
+              </a:ext>
+            </a:extLst>
+          </p:cNvPr>
+          <p:cNvCxnSpPr>
+            <a:cxnSpLocks/>
+          </p:cNvCxnSpPr>
+          <p:nvPr/>
+        </p:nvCxnSpPr>
+        <p:spPr>
+          <a:xfrm>
+            <a:off x="450056" y="1447206"/>
+            <a:ext cx="2571750" cy="0"/>
+          </a:xfrm>
+          <a:prstGeom prst="line">
+            <a:avLst/>
+          </a:prstGeom>
+          <a:ln w="38100"/>
+        </p:spPr>
+        <p:style>
+          <a:lnRef idx="2">
+            <a:schemeClr val="accent6"/>
+          </a:lnRef>
+          <a:fillRef idx="0">
+            <a:schemeClr val="accent6"/>
+          </a:fillRef>
+          <a:effectRef idx="1">
+            <a:schemeClr val="accent6"/>
+          </a:effectRef>
+          <a:fontRef idx="minor">
+            <a:schemeClr val="tx1"/>
+          </a:fontRef>
+        </p:style>
+      </p:cxnSp>
+      <p:sp>
+        <p:nvSpPr>
+          <p:cNvPr id="28" name="矢印: 折線 27">
+            <a:extLst>
+              <a:ext uri="{FF2B5EF4-FFF2-40B4-BE49-F238E27FC236}">
+                <a16:creationId xmlns:a16="http://schemas.microsoft.com/office/drawing/2014/main" id="{83BDC8C6-F07E-FE46-6294-23F2EFAFB65F}"/>
+              </a:ext>
+            </a:extLst>
+          </p:cNvPr>
+          <p:cNvSpPr/>
+          <p:nvPr/>
+        </p:nvSpPr>
+        <p:spPr>
+          <a:xfrm flipV="1">
+            <a:off x="4807744" y="1857374"/>
+            <a:ext cx="1914525" cy="935832"/>
+          </a:xfrm>
+          <a:prstGeom prst="bentArrow">
+            <a:avLst/>
+          </a:prstGeom>
+          <a:solidFill>
+            <a:srgbClr val="00B0F0"/>
+          </a:solidFill>
+          <a:ln>
+            <a:solidFill>
+              <a:schemeClr val="tx1"/>
+            </a:solidFill>
+          </a:ln>
+        </p:spPr>
+        <p:style>
+          <a:lnRef idx="2">
+            <a:schemeClr val="accent6">
+              <a:shade val="15000"/>
+            </a:schemeClr>
+          </a:lnRef>
+          <a:fillRef idx="1">
+            <a:schemeClr val="accent6"/>
+          </a:fillRef>
+          <a:effectRef idx="0">
+            <a:schemeClr val="accent6"/>
+          </a:effectRef>
+          <a:fontRef idx="minor">
+            <a:schemeClr val="lt1"/>
+          </a:fontRef>
+        </p:style>
+        <p:txBody>
+          <a:bodyPr rtlCol="0" anchor="ctr"/>
+          <a:lstStyle/>
+          <a:p>
+            <a:pPr algn="ctr"/>
+            <a:endParaRPr kumimoji="1" lang="ja-JP" altLang="en-US">
+              <a:solidFill>
+                <a:schemeClr val="tx1"/>
+              </a:solidFill>
+            </a:endParaRPr>
+          </a:p>
+        </p:txBody>
+      </p:sp>
+      <p:sp>
+        <p:nvSpPr>
+          <p:cNvPr id="29" name="矢印: 右 28">
+            <a:extLst>
+              <a:ext uri="{FF2B5EF4-FFF2-40B4-BE49-F238E27FC236}">
+                <a16:creationId xmlns:a16="http://schemas.microsoft.com/office/drawing/2014/main" id="{97BEA775-5710-6064-1FA6-CB6966F18534}"/>
+              </a:ext>
+            </a:extLst>
+          </p:cNvPr>
+          <p:cNvSpPr/>
+          <p:nvPr/>
+        </p:nvSpPr>
+        <p:spPr>
+          <a:xfrm rot="5400000">
+            <a:off x="6434138" y="5450682"/>
+            <a:ext cx="1200150" cy="514350"/>
+          </a:xfrm>
+          <a:prstGeom prst="rightArrow">
+            <a:avLst/>
+          </a:prstGeom>
+          <a:solidFill>
+            <a:srgbClr val="00B0F0"/>
+          </a:solidFill>
+          <a:ln>
+            <a:solidFill>
+              <a:schemeClr val="tx1"/>
+            </a:solidFill>
+          </a:ln>
+        </p:spPr>
+        <p:style>
+          <a:lnRef idx="2">
+            <a:schemeClr val="accent1">
+              <a:shade val="15000"/>
+            </a:schemeClr>
+          </a:lnRef>
+          <a:fillRef idx="1">
+            <a:schemeClr val="accent1"/>
+          </a:fillRef>
+          <a:effectRef idx="0">
+            <a:schemeClr val="accent1"/>
+          </a:effectRef>
+          <a:fontRef idx="minor">
+            <a:schemeClr val="lt1"/>
+          </a:fontRef>
+        </p:style>
+        <p:txBody>
+          <a:bodyPr rtlCol="0" anchor="ctr"/>
+          <a:lstStyle/>
+          <a:p>
+            <a:pPr algn="ctr"/>
+            <a:endParaRPr kumimoji="1" lang="ja-JP" altLang="en-US"/>
+          </a:p>
+        </p:txBody>
+      </p:sp>
+      <p:sp>
+        <p:nvSpPr>
+          <p:cNvPr id="30" name="矢印: 折線 29">
+            <a:extLst>
+              <a:ext uri="{FF2B5EF4-FFF2-40B4-BE49-F238E27FC236}">
+                <a16:creationId xmlns:a16="http://schemas.microsoft.com/office/drawing/2014/main" id="{4618D3C5-59BE-379F-D764-7ACDA4B5B40E}"/>
+              </a:ext>
+            </a:extLst>
+          </p:cNvPr>
+          <p:cNvSpPr/>
+          <p:nvPr/>
+        </p:nvSpPr>
+        <p:spPr>
+          <a:xfrm rot="5400000" flipV="1">
+            <a:off x="6382348" y="4038004"/>
+            <a:ext cx="882250" cy="935832"/>
+          </a:xfrm>
+          <a:prstGeom prst="bentArrow">
+            <a:avLst/>
+          </a:prstGeom>
+          <a:solidFill>
+            <a:srgbClr val="00B0F0"/>
+          </a:solidFill>
+          <a:ln>
+            <a:solidFill>
+              <a:schemeClr val="tx1"/>
+            </a:solidFill>
+          </a:ln>
+        </p:spPr>
+        <p:style>
+          <a:lnRef idx="2">
+            <a:schemeClr val="accent6">
+              <a:shade val="15000"/>
+            </a:schemeClr>
+          </a:lnRef>
+          <a:fillRef idx="1">
+            <a:schemeClr val="accent6"/>
+          </a:fillRef>
+          <a:effectRef idx="0">
+            <a:schemeClr val="accent6"/>
+          </a:effectRef>
+          <a:fontRef idx="minor">
+            <a:schemeClr val="lt1"/>
+          </a:fontRef>
+        </p:style>
+        <p:txBody>
+          <a:bodyPr rtlCol="0" anchor="ctr"/>
+          <a:lstStyle/>
+          <a:p>
+            <a:pPr algn="ctr"/>
+            <a:endParaRPr kumimoji="1" lang="ja-JP" altLang="en-US">
+              <a:solidFill>
+                <a:schemeClr val="tx1"/>
+              </a:solidFill>
+            </a:endParaRPr>
+          </a:p>
+        </p:txBody>
+      </p:sp>
+      <p:sp>
+        <p:nvSpPr>
+          <p:cNvPr id="31" name="矢印: 折線 30">
+            <a:extLst>
+              <a:ext uri="{FF2B5EF4-FFF2-40B4-BE49-F238E27FC236}">
+                <a16:creationId xmlns:a16="http://schemas.microsoft.com/office/drawing/2014/main" id="{B5DCAEC3-4E34-377A-8500-A7B59C3DEF39}"/>
+              </a:ext>
+            </a:extLst>
+          </p:cNvPr>
+          <p:cNvSpPr/>
+          <p:nvPr/>
+        </p:nvSpPr>
+        <p:spPr>
+          <a:xfrm rot="16200000" flipH="1" flipV="1">
+            <a:off x="7069339" y="2461023"/>
+            <a:ext cx="882250" cy="935832"/>
+          </a:xfrm>
+          <a:prstGeom prst="bentArrow">
+            <a:avLst/>
+          </a:prstGeom>
+          <a:solidFill>
+            <a:srgbClr val="00B0F0"/>
+          </a:solidFill>
+          <a:ln>
+            <a:solidFill>
+              <a:schemeClr val="tx1"/>
+            </a:solidFill>
+          </a:ln>
+        </p:spPr>
+        <p:style>
+          <a:lnRef idx="2">
+            <a:schemeClr val="accent6">
+              <a:shade val="15000"/>
+            </a:schemeClr>
+          </a:lnRef>
+          <a:fillRef idx="1">
+            <a:schemeClr val="accent6"/>
+          </a:fillRef>
+          <a:effectRef idx="0">
+            <a:schemeClr val="accent6"/>
+          </a:effectRef>
+          <a:fontRef idx="minor">
+            <a:schemeClr val="lt1"/>
+          </a:fontRef>
+        </p:style>
+        <p:txBody>
+          <a:bodyPr rtlCol="0" anchor="ctr"/>
+          <a:lstStyle/>
+          <a:p>
+            <a:pPr algn="ctr"/>
+            <a:endParaRPr kumimoji="1" lang="ja-JP" altLang="en-US">
+              <a:solidFill>
+                <a:schemeClr val="tx1"/>
+              </a:solidFill>
+            </a:endParaRPr>
+          </a:p>
+        </p:txBody>
+      </p:sp>
+      <p:cxnSp>
+        <p:nvCxnSpPr>
+          <p:cNvPr id="32" name="直線コネクタ 31">
+            <a:extLst>
+              <a:ext uri="{FF2B5EF4-FFF2-40B4-BE49-F238E27FC236}">
+                <a16:creationId xmlns:a16="http://schemas.microsoft.com/office/drawing/2014/main" id="{578DE378-7FA9-5C96-B65C-6ACC36E40D27}"/>
+              </a:ext>
+            </a:extLst>
+          </p:cNvPr>
+          <p:cNvCxnSpPr>
+            <a:cxnSpLocks/>
+          </p:cNvCxnSpPr>
+          <p:nvPr/>
+        </p:nvCxnSpPr>
+        <p:spPr>
+          <a:xfrm>
+            <a:off x="7267575" y="5708550"/>
+            <a:ext cx="588991" cy="543618"/>
+          </a:xfrm>
+          <a:prstGeom prst="line">
+            <a:avLst/>
+          </a:prstGeom>
+          <a:ln w="50800" cap="rnd">
+            <a:solidFill>
+              <a:schemeClr val="tx1"/>
+            </a:solidFill>
+            <a:round/>
+            <a:headEnd type="oval"/>
+            <a:tailEnd type="none"/>
+          </a:ln>
+        </p:spPr>
+        <p:style>
+          <a:lnRef idx="2">
+            <a:schemeClr val="accent1"/>
+          </a:lnRef>
+          <a:fillRef idx="0">
+            <a:schemeClr val="accent1"/>
+          </a:fillRef>
+          <a:effectRef idx="1">
+            <a:schemeClr val="accent1"/>
+          </a:effectRef>
+          <a:fontRef idx="minor">
+            <a:schemeClr val="tx1"/>
+          </a:fontRef>
+        </p:style>
+      </p:cxnSp>
+      <p:sp>
+        <p:nvSpPr>
+          <p:cNvPr id="34" name="テキスト ボックス 33">
+            <a:extLst>
+              <a:ext uri="{FF2B5EF4-FFF2-40B4-BE49-F238E27FC236}">
+                <a16:creationId xmlns:a16="http://schemas.microsoft.com/office/drawing/2014/main" id="{CF5E700C-CFD4-CB4E-F288-18CFBCA5AD5C}"/>
+              </a:ext>
+            </a:extLst>
+          </p:cNvPr>
+          <p:cNvSpPr txBox="1"/>
+          <p:nvPr/>
+        </p:nvSpPr>
+        <p:spPr>
+          <a:xfrm>
+            <a:off x="7856567" y="6002436"/>
+            <a:ext cx="1668434" cy="461665"/>
+          </a:xfrm>
+          <a:prstGeom prst="rect">
+            <a:avLst/>
+          </a:prstGeom>
+          <a:noFill/>
+        </p:spPr>
+        <p:txBody>
+          <a:bodyPr wrap="square" rtlCol="0">
+            <a:spAutoFit/>
+          </a:bodyPr>
+          <a:lstStyle/>
+          <a:p>
+            <a:pPr algn="ctr"/>
+            <a:r>
+              <a:rPr lang="ja-JP" altLang="en-US" sz="2400" dirty="0"/>
+              <a:t>バス出力</a:t>
+            </a:r>
+            <a:endParaRPr kumimoji="1" lang="ja-JP" altLang="en-US" sz="2400" dirty="0"/>
+          </a:p>
+        </p:txBody>
+      </p:sp>
+      <p:cxnSp>
+        <p:nvCxnSpPr>
+          <p:cNvPr id="36" name="直線コネクタ 35">
+            <a:extLst>
+              <a:ext uri="{FF2B5EF4-FFF2-40B4-BE49-F238E27FC236}">
+                <a16:creationId xmlns:a16="http://schemas.microsoft.com/office/drawing/2014/main" id="{FD5A339C-F6C1-DE93-51A3-9B79A49108F2}"/>
+              </a:ext>
+            </a:extLst>
+          </p:cNvPr>
+          <p:cNvCxnSpPr>
+            <a:cxnSpLocks/>
+            <a:endCxn id="38" idx="1"/>
+          </p:cNvCxnSpPr>
+          <p:nvPr/>
+        </p:nvCxnSpPr>
+        <p:spPr>
+          <a:xfrm flipV="1">
+            <a:off x="8074452" y="2191225"/>
+            <a:ext cx="1232662" cy="601981"/>
+          </a:xfrm>
+          <a:prstGeom prst="line">
+            <a:avLst/>
+          </a:prstGeom>
+          <a:ln w="50800" cap="rnd">
+            <a:solidFill>
+              <a:schemeClr val="tx1"/>
+            </a:solidFill>
+            <a:round/>
+            <a:headEnd type="oval"/>
+            <a:tailEnd type="none"/>
+          </a:ln>
+        </p:spPr>
+        <p:style>
+          <a:lnRef idx="2">
+            <a:schemeClr val="accent1"/>
+          </a:lnRef>
+          <a:fillRef idx="0">
+            <a:schemeClr val="accent1"/>
+          </a:fillRef>
+          <a:effectRef idx="1">
+            <a:schemeClr val="accent1"/>
+          </a:effectRef>
+          <a:fontRef idx="minor">
+            <a:schemeClr val="tx1"/>
+          </a:fontRef>
+        </p:style>
+      </p:cxnSp>
+      <p:sp>
+        <p:nvSpPr>
+          <p:cNvPr id="38" name="テキスト ボックス 37">
+            <a:extLst>
+              <a:ext uri="{FF2B5EF4-FFF2-40B4-BE49-F238E27FC236}">
+                <a16:creationId xmlns:a16="http://schemas.microsoft.com/office/drawing/2014/main" id="{69894FFE-C524-687C-B1ED-52772DB93599}"/>
+              </a:ext>
+            </a:extLst>
+          </p:cNvPr>
+          <p:cNvSpPr txBox="1"/>
+          <p:nvPr/>
+        </p:nvSpPr>
+        <p:spPr>
+          <a:xfrm>
+            <a:off x="9307114" y="1837282"/>
+            <a:ext cx="2358629" cy="707886"/>
+          </a:xfrm>
+          <a:prstGeom prst="rect">
+            <a:avLst/>
+          </a:prstGeom>
+          <a:noFill/>
+        </p:spPr>
+        <p:txBody>
+          <a:bodyPr wrap="square" rtlCol="0">
+            <a:spAutoFit/>
+          </a:bodyPr>
+          <a:lstStyle/>
+          <a:p>
+            <a:pPr algn="ctr"/>
+            <a:r>
+              <a:rPr lang="en-US" altLang="ja-JP" sz="2000" dirty="0">
+                <a:solidFill>
+                  <a:srgbClr val="00B050"/>
+                </a:solidFill>
+              </a:rPr>
+              <a:t>DCDC</a:t>
+            </a:r>
+            <a:r>
+              <a:rPr lang="ja-JP" altLang="en-US" sz="2000" dirty="0">
+                <a:solidFill>
+                  <a:srgbClr val="00B050"/>
+                </a:solidFill>
+              </a:rPr>
+              <a:t>コンバーターを介して変圧</a:t>
+            </a:r>
+            <a:endParaRPr kumimoji="1" lang="ja-JP" altLang="en-US" sz="2000" dirty="0">
+              <a:solidFill>
+                <a:srgbClr val="00B050"/>
+              </a:solidFill>
+            </a:endParaRPr>
+          </a:p>
+        </p:txBody>
+      </p:sp>
+      <p:cxnSp>
+        <p:nvCxnSpPr>
+          <p:cNvPr id="41" name="直線コネクタ 40">
+            <a:extLst>
+              <a:ext uri="{FF2B5EF4-FFF2-40B4-BE49-F238E27FC236}">
+                <a16:creationId xmlns:a16="http://schemas.microsoft.com/office/drawing/2014/main" id="{71584AFA-C171-BD37-BB99-9FC06BE1B5E0}"/>
+              </a:ext>
+            </a:extLst>
+          </p:cNvPr>
+          <p:cNvCxnSpPr>
+            <a:cxnSpLocks/>
+            <a:endCxn id="42" idx="3"/>
+          </p:cNvCxnSpPr>
+          <p:nvPr/>
+        </p:nvCxnSpPr>
+        <p:spPr>
+          <a:xfrm flipH="1" flipV="1">
+            <a:off x="2666999" y="4505920"/>
+            <a:ext cx="2633201" cy="617604"/>
+          </a:xfrm>
+          <a:prstGeom prst="line">
+            <a:avLst/>
+          </a:prstGeom>
+          <a:ln w="50800" cap="rnd">
+            <a:solidFill>
+              <a:schemeClr val="tx1"/>
+            </a:solidFill>
+            <a:round/>
+            <a:headEnd type="oval"/>
+            <a:tailEnd type="none"/>
+          </a:ln>
+        </p:spPr>
+        <p:style>
+          <a:lnRef idx="2">
+            <a:schemeClr val="accent1"/>
+          </a:lnRef>
+          <a:fillRef idx="0">
+            <a:schemeClr val="accent1"/>
+          </a:fillRef>
+          <a:effectRef idx="1">
+            <a:schemeClr val="accent1"/>
+          </a:effectRef>
+          <a:fontRef idx="minor">
+            <a:schemeClr val="tx1"/>
+          </a:fontRef>
+        </p:style>
+      </p:cxnSp>
+      <p:sp>
+        <p:nvSpPr>
+          <p:cNvPr id="42" name="テキスト ボックス 41">
+            <a:extLst>
+              <a:ext uri="{FF2B5EF4-FFF2-40B4-BE49-F238E27FC236}">
+                <a16:creationId xmlns:a16="http://schemas.microsoft.com/office/drawing/2014/main" id="{94B0F6D8-817B-3C0F-7583-4D29BD89B274}"/>
+              </a:ext>
+            </a:extLst>
+          </p:cNvPr>
+          <p:cNvSpPr txBox="1"/>
+          <p:nvPr/>
+        </p:nvSpPr>
+        <p:spPr>
+          <a:xfrm>
+            <a:off x="986971" y="4151977"/>
+            <a:ext cx="1680028" cy="707886"/>
+          </a:xfrm>
+          <a:prstGeom prst="rect">
+            <a:avLst/>
+          </a:prstGeom>
+          <a:noFill/>
+        </p:spPr>
+        <p:txBody>
+          <a:bodyPr wrap="square" rtlCol="0">
+            <a:spAutoFit/>
+          </a:bodyPr>
+          <a:lstStyle/>
+          <a:p>
+            <a:pPr algn="ctr"/>
+            <a:r>
+              <a:rPr lang="ja-JP" altLang="en-US" sz="2000" dirty="0">
+                <a:solidFill>
+                  <a:srgbClr val="00B050"/>
+                </a:solidFill>
+              </a:rPr>
+              <a:t>内部電源は</a:t>
+            </a:r>
+            <a:endParaRPr lang="en-US" altLang="ja-JP" sz="2000" dirty="0">
+              <a:solidFill>
+                <a:srgbClr val="00B050"/>
+              </a:solidFill>
+            </a:endParaRPr>
+          </a:p>
+          <a:p>
+            <a:pPr algn="ctr"/>
+            <a:r>
+              <a:rPr lang="ja-JP" altLang="en-US" sz="2000" dirty="0">
+                <a:solidFill>
+                  <a:srgbClr val="00B050"/>
+                </a:solidFill>
+              </a:rPr>
+              <a:t>遮断される</a:t>
+            </a:r>
+            <a:endParaRPr kumimoji="1" lang="ja-JP" altLang="en-US" sz="2000" dirty="0">
+              <a:solidFill>
+                <a:srgbClr val="00B050"/>
+              </a:solidFill>
+            </a:endParaRPr>
+          </a:p>
+        </p:txBody>
+      </p:sp>
+      <p:sp>
+        <p:nvSpPr>
+          <p:cNvPr id="49" name="テキスト ボックス 48">
+            <a:extLst>
+              <a:ext uri="{FF2B5EF4-FFF2-40B4-BE49-F238E27FC236}">
+                <a16:creationId xmlns:a16="http://schemas.microsoft.com/office/drawing/2014/main" id="{24205C2E-8F27-54ED-E742-E5E5F68DF476}"/>
+              </a:ext>
+            </a:extLst>
+          </p:cNvPr>
+          <p:cNvSpPr txBox="1"/>
+          <p:nvPr/>
+        </p:nvSpPr>
+        <p:spPr>
+          <a:xfrm>
+            <a:off x="4969430" y="280357"/>
+            <a:ext cx="822960" cy="369332"/>
+          </a:xfrm>
+          <a:prstGeom prst="rect">
+            <a:avLst/>
+          </a:prstGeom>
+          <a:noFill/>
+        </p:spPr>
+        <p:txBody>
+          <a:bodyPr wrap="square" rtlCol="0">
+            <a:spAutoFit/>
+          </a:bodyPr>
+          <a:lstStyle/>
+          <a:p>
+            <a:pPr algn="ctr"/>
+            <a:r>
+              <a:rPr kumimoji="1" lang="en-US" altLang="ja-JP" b="1" dirty="0"/>
+              <a:t>17 V</a:t>
+            </a:r>
+            <a:endParaRPr kumimoji="1" lang="ja-JP" altLang="en-US" b="1" dirty="0"/>
+          </a:p>
+        </p:txBody>
+      </p:sp>
+    </p:spTree>
+    <p:extLst>
+      <p:ext uri="{BB962C8B-B14F-4D97-AF65-F5344CB8AC3E}">
+        <p14:creationId xmlns:p14="http://schemas.microsoft.com/office/powerpoint/2010/main" val="2165467287"/>
+      </p:ext>
+    </p:extLst>
+  </p:cSld>
+  <p:clrMapOvr>
+    <a:masterClrMapping/>
+  </p:clrMapOvr>
+</p:sld>
+</file>
+
+<file path=ppt/slides/slide4.xml><?xml version="1.0" encoding="utf-8"?>
+<p:sld xmlns:a="http://schemas.openxmlformats.org/drawingml/2006/main" xmlns:r="http://schemas.openxmlformats.org/officeDocument/2006/relationships" xmlns:p="http://schemas.openxmlformats.org/presentationml/2006/main">
+  <p:cSld>
+    <p:spTree>
+      <p:nvGrpSpPr>
+        <p:cNvPr id="1" name="">
+          <a:extLst>
+            <a:ext uri="{FF2B5EF4-FFF2-40B4-BE49-F238E27FC236}">
+              <a16:creationId xmlns:a16="http://schemas.microsoft.com/office/drawing/2014/main" id="{815C77DB-7ADC-F86D-B146-4CFD400981A2}"/>
+            </a:ext>
+          </a:extLst>
+        </p:cNvPr>
+        <p:cNvGrpSpPr/>
+        <p:nvPr/>
+      </p:nvGrpSpPr>
+      <p:grpSpPr>
+        <a:xfrm>
+          <a:off x="0" y="0"/>
+          <a:ext cx="0" cy="0"/>
+          <a:chOff x="0" y="0"/>
+          <a:chExt cx="0" cy="0"/>
+        </a:xfrm>
+      </p:grpSpPr>
+      <p:pic>
+        <p:nvPicPr>
+          <p:cNvPr id="4" name="図 3" descr="グラフィカル ユーザー インターフェイス が含まれている画像&#10;&#10;AI 生成コンテンツは誤りを含む可能性があります。">
+            <a:extLst>
+              <a:ext uri="{FF2B5EF4-FFF2-40B4-BE49-F238E27FC236}">
+                <a16:creationId xmlns:a16="http://schemas.microsoft.com/office/drawing/2014/main" id="{3645F9E5-03BF-6CED-4F7D-1477530FD2DD}"/>
+              </a:ext>
+            </a:extLst>
+          </p:cNvPr>
+          <p:cNvPicPr>
+            <a:picLocks noGrp="1" noRot="1" noChangeAspect="1" noMove="1" noResize="1" noEditPoints="1" noAdjustHandles="1" noChangeArrowheads="1" noChangeShapeType="1" noCrop="1"/>
+          </p:cNvPicPr>
+          <p:nvPr/>
+        </p:nvPicPr>
+        <p:blipFill>
+          <a:blip r:embed="rId2">
+            <a:extLst>
+              <a:ext uri="{28A0092B-C50C-407E-A947-70E740481C1C}">
+                <a14:useLocalDpi xmlns:a14="http://schemas.microsoft.com/office/drawing/2010/main" val="0"/>
+              </a:ext>
+            </a:extLst>
+          </a:blip>
+          <a:stretch>
+            <a:fillRect/>
+          </a:stretch>
+        </p:blipFill>
+        <p:spPr>
+          <a:xfrm>
+            <a:off x="2667000" y="0"/>
+            <a:ext cx="6858000" cy="6858000"/>
+          </a:xfrm>
+          <a:prstGeom prst="rect">
+            <a:avLst/>
+          </a:prstGeom>
+        </p:spPr>
+      </p:pic>
+      <p:cxnSp>
+        <p:nvCxnSpPr>
+          <p:cNvPr id="5" name="直線コネクタ 4">
+            <a:extLst>
+              <a:ext uri="{FF2B5EF4-FFF2-40B4-BE49-F238E27FC236}">
+                <a16:creationId xmlns:a16="http://schemas.microsoft.com/office/drawing/2014/main" id="{B962905C-B0E3-48CD-F91F-B5A598C07126}"/>
+              </a:ext>
+            </a:extLst>
+          </p:cNvPr>
+          <p:cNvCxnSpPr>
+            <a:cxnSpLocks/>
+            <a:endCxn id="6" idx="3"/>
+          </p:cNvCxnSpPr>
+          <p:nvPr/>
+        </p:nvCxnSpPr>
+        <p:spPr>
+          <a:xfrm flipH="1" flipV="1">
+            <a:off x="4168442" y="605831"/>
+            <a:ext cx="553577" cy="365719"/>
+          </a:xfrm>
+          <a:prstGeom prst="line">
+            <a:avLst/>
+          </a:prstGeom>
+          <a:ln w="50800" cap="rnd">
+            <a:solidFill>
+              <a:schemeClr val="tx1"/>
+            </a:solidFill>
+            <a:round/>
+            <a:headEnd type="oval"/>
+            <a:tailEnd type="none"/>
+          </a:ln>
+        </p:spPr>
+        <p:style>
+          <a:lnRef idx="2">
+            <a:schemeClr val="accent1"/>
+          </a:lnRef>
+          <a:fillRef idx="0">
+            <a:schemeClr val="accent1"/>
+          </a:fillRef>
+          <a:effectRef idx="1">
+            <a:schemeClr val="accent1"/>
+          </a:effectRef>
+          <a:fontRef idx="minor">
+            <a:schemeClr val="tx1"/>
+          </a:fontRef>
+        </p:style>
+      </p:cxnSp>
+      <p:sp>
+        <p:nvSpPr>
+          <p:cNvPr id="6" name="テキスト ボックス 5">
+            <a:extLst>
+              <a:ext uri="{FF2B5EF4-FFF2-40B4-BE49-F238E27FC236}">
+                <a16:creationId xmlns:a16="http://schemas.microsoft.com/office/drawing/2014/main" id="{225798DA-C50C-CF37-11A0-B51595595BDD}"/>
+              </a:ext>
+            </a:extLst>
+          </p:cNvPr>
+          <p:cNvSpPr txBox="1"/>
+          <p:nvPr/>
+        </p:nvSpPr>
+        <p:spPr>
+          <a:xfrm>
+            <a:off x="1878805" y="374998"/>
+            <a:ext cx="2289637" cy="461665"/>
+          </a:xfrm>
+          <a:prstGeom prst="rect">
+            <a:avLst/>
+          </a:prstGeom>
+          <a:noFill/>
+        </p:spPr>
+        <p:txBody>
+          <a:bodyPr wrap="square" rtlCol="0">
+            <a:spAutoFit/>
+          </a:bodyPr>
+          <a:lstStyle/>
+          <a:p>
+            <a:pPr algn="ctr"/>
+            <a:r>
+              <a:rPr lang="ja-JP" altLang="en-US" sz="2400" dirty="0"/>
+              <a:t>外部電源入力</a:t>
+            </a:r>
+            <a:endParaRPr kumimoji="1" lang="ja-JP" altLang="en-US" sz="2400" dirty="0"/>
+          </a:p>
+        </p:txBody>
+      </p:sp>
+      <p:cxnSp>
+        <p:nvCxnSpPr>
+          <p:cNvPr id="7" name="直線コネクタ 6">
+            <a:extLst>
+              <a:ext uri="{FF2B5EF4-FFF2-40B4-BE49-F238E27FC236}">
+                <a16:creationId xmlns:a16="http://schemas.microsoft.com/office/drawing/2014/main" id="{1AE87B7D-7840-D4D9-BCAA-3A0E549086D4}"/>
+              </a:ext>
+            </a:extLst>
+          </p:cNvPr>
+          <p:cNvCxnSpPr>
+            <a:cxnSpLocks/>
+            <a:endCxn id="8" idx="3"/>
+          </p:cNvCxnSpPr>
+          <p:nvPr/>
+        </p:nvCxnSpPr>
+        <p:spPr>
+          <a:xfrm flipH="1">
+            <a:off x="4722019" y="5822156"/>
+            <a:ext cx="328612" cy="430013"/>
+          </a:xfrm>
+          <a:prstGeom prst="line">
+            <a:avLst/>
+          </a:prstGeom>
+          <a:ln w="50800" cap="rnd">
+            <a:solidFill>
+              <a:schemeClr val="tx1"/>
+            </a:solidFill>
+            <a:round/>
+            <a:headEnd type="oval"/>
+            <a:tailEnd type="none"/>
+          </a:ln>
+        </p:spPr>
+        <p:style>
+          <a:lnRef idx="2">
+            <a:schemeClr val="accent1"/>
+          </a:lnRef>
+          <a:fillRef idx="0">
+            <a:schemeClr val="accent1"/>
+          </a:fillRef>
+          <a:effectRef idx="1">
+            <a:schemeClr val="accent1"/>
+          </a:effectRef>
+          <a:fontRef idx="minor">
+            <a:schemeClr val="tx1"/>
+          </a:fontRef>
+        </p:style>
+      </p:cxnSp>
+      <p:sp>
+        <p:nvSpPr>
+          <p:cNvPr id="8" name="テキスト ボックス 7">
+            <a:extLst>
+              <a:ext uri="{FF2B5EF4-FFF2-40B4-BE49-F238E27FC236}">
+                <a16:creationId xmlns:a16="http://schemas.microsoft.com/office/drawing/2014/main" id="{AC4FE927-2D7C-E3A8-0E19-1885936CE026}"/>
+              </a:ext>
+            </a:extLst>
+          </p:cNvPr>
+          <p:cNvSpPr txBox="1"/>
+          <p:nvPr/>
+        </p:nvSpPr>
+        <p:spPr>
+          <a:xfrm>
+            <a:off x="2563048" y="6021336"/>
+            <a:ext cx="2158971" cy="461665"/>
+          </a:xfrm>
+          <a:prstGeom prst="rect">
+            <a:avLst/>
+          </a:prstGeom>
+          <a:noFill/>
+        </p:spPr>
+        <p:txBody>
+          <a:bodyPr wrap="square" rtlCol="0">
+            <a:spAutoFit/>
+          </a:bodyPr>
+          <a:lstStyle/>
+          <a:p>
+            <a:pPr algn="ctr"/>
+            <a:r>
+              <a:rPr lang="ja-JP" altLang="en-US" sz="2400" dirty="0"/>
+              <a:t>内部電源</a:t>
+            </a:r>
+            <a:r>
+              <a:rPr kumimoji="1" lang="ja-JP" altLang="en-US" sz="2400" dirty="0"/>
+              <a:t>入力</a:t>
+            </a:r>
+          </a:p>
+        </p:txBody>
+      </p:sp>
+      <p:sp>
+        <p:nvSpPr>
+          <p:cNvPr id="28" name="矢印: 折線 27">
+            <a:extLst>
+              <a:ext uri="{FF2B5EF4-FFF2-40B4-BE49-F238E27FC236}">
+                <a16:creationId xmlns:a16="http://schemas.microsoft.com/office/drawing/2014/main" id="{56EADB92-6B0D-FCDF-1464-01BEB437C2D1}"/>
+              </a:ext>
+            </a:extLst>
+          </p:cNvPr>
+          <p:cNvSpPr/>
+          <p:nvPr/>
+        </p:nvSpPr>
+        <p:spPr>
+          <a:xfrm flipV="1">
+            <a:off x="4807744" y="1857374"/>
+            <a:ext cx="1914525" cy="935832"/>
+          </a:xfrm>
+          <a:prstGeom prst="bentArrow">
+            <a:avLst/>
+          </a:prstGeom>
+          <a:solidFill>
+            <a:srgbClr val="00B0F0"/>
+          </a:solidFill>
+          <a:ln>
+            <a:solidFill>
+              <a:schemeClr val="tx1"/>
+            </a:solidFill>
+          </a:ln>
+        </p:spPr>
+        <p:style>
+          <a:lnRef idx="2">
+            <a:schemeClr val="accent6">
+              <a:shade val="15000"/>
+            </a:schemeClr>
+          </a:lnRef>
+          <a:fillRef idx="1">
+            <a:schemeClr val="accent6"/>
+          </a:fillRef>
+          <a:effectRef idx="0">
+            <a:schemeClr val="accent6"/>
+          </a:effectRef>
+          <a:fontRef idx="minor">
+            <a:schemeClr val="lt1"/>
+          </a:fontRef>
+        </p:style>
+        <p:txBody>
+          <a:bodyPr rtlCol="0" anchor="ctr"/>
+          <a:lstStyle/>
+          <a:p>
+            <a:pPr algn="ctr"/>
+            <a:endParaRPr kumimoji="1" lang="ja-JP" altLang="en-US">
+              <a:solidFill>
+                <a:schemeClr val="tx1"/>
+              </a:solidFill>
+            </a:endParaRPr>
+          </a:p>
+        </p:txBody>
+      </p:sp>
+      <p:sp>
+        <p:nvSpPr>
+          <p:cNvPr id="29" name="矢印: 右 28">
+            <a:extLst>
+              <a:ext uri="{FF2B5EF4-FFF2-40B4-BE49-F238E27FC236}">
+                <a16:creationId xmlns:a16="http://schemas.microsoft.com/office/drawing/2014/main" id="{C3899E86-CDE5-08E7-20B6-834A80061770}"/>
+              </a:ext>
+            </a:extLst>
+          </p:cNvPr>
+          <p:cNvSpPr/>
+          <p:nvPr/>
+        </p:nvSpPr>
+        <p:spPr>
+          <a:xfrm rot="5400000">
+            <a:off x="6434138" y="5450682"/>
+            <a:ext cx="1200150" cy="514350"/>
+          </a:xfrm>
+          <a:prstGeom prst="rightArrow">
+            <a:avLst/>
+          </a:prstGeom>
+          <a:solidFill>
+            <a:srgbClr val="00B0F0"/>
+          </a:solidFill>
+          <a:ln>
+            <a:solidFill>
+              <a:schemeClr val="tx1"/>
+            </a:solidFill>
+          </a:ln>
+        </p:spPr>
+        <p:style>
+          <a:lnRef idx="2">
+            <a:schemeClr val="accent1">
+              <a:shade val="15000"/>
+            </a:schemeClr>
+          </a:lnRef>
+          <a:fillRef idx="1">
+            <a:schemeClr val="accent1"/>
+          </a:fillRef>
+          <a:effectRef idx="0">
+            <a:schemeClr val="accent1"/>
+          </a:effectRef>
+          <a:fontRef idx="minor">
+            <a:schemeClr val="lt1"/>
+          </a:fontRef>
+        </p:style>
+        <p:txBody>
+          <a:bodyPr rtlCol="0" anchor="ctr"/>
+          <a:lstStyle/>
+          <a:p>
+            <a:pPr algn="ctr"/>
+            <a:endParaRPr kumimoji="1" lang="ja-JP" altLang="en-US"/>
+          </a:p>
+        </p:txBody>
+      </p:sp>
+      <p:sp>
+        <p:nvSpPr>
+          <p:cNvPr id="30" name="矢印: 折線 29">
+            <a:extLst>
+              <a:ext uri="{FF2B5EF4-FFF2-40B4-BE49-F238E27FC236}">
+                <a16:creationId xmlns:a16="http://schemas.microsoft.com/office/drawing/2014/main" id="{BA0CCD2A-E979-4357-D2E0-CE8078509AC4}"/>
+              </a:ext>
+            </a:extLst>
+          </p:cNvPr>
+          <p:cNvSpPr/>
+          <p:nvPr/>
+        </p:nvSpPr>
+        <p:spPr>
+          <a:xfrm rot="5400000" flipV="1">
+            <a:off x="6382348" y="4038004"/>
+            <a:ext cx="882250" cy="935832"/>
+          </a:xfrm>
+          <a:prstGeom prst="bentArrow">
+            <a:avLst/>
+          </a:prstGeom>
+          <a:solidFill>
+            <a:srgbClr val="00B0F0"/>
+          </a:solidFill>
+          <a:ln>
+            <a:solidFill>
+              <a:schemeClr val="tx1"/>
+            </a:solidFill>
+          </a:ln>
+        </p:spPr>
+        <p:style>
+          <a:lnRef idx="2">
+            <a:schemeClr val="accent6">
+              <a:shade val="15000"/>
+            </a:schemeClr>
+          </a:lnRef>
+          <a:fillRef idx="1">
+            <a:schemeClr val="accent6"/>
+          </a:fillRef>
+          <a:effectRef idx="0">
+            <a:schemeClr val="accent6"/>
+          </a:effectRef>
+          <a:fontRef idx="minor">
+            <a:schemeClr val="lt1"/>
+          </a:fontRef>
+        </p:style>
+        <p:txBody>
+          <a:bodyPr rtlCol="0" anchor="ctr"/>
+          <a:lstStyle/>
+          <a:p>
+            <a:pPr algn="ctr"/>
+            <a:endParaRPr kumimoji="1" lang="ja-JP" altLang="en-US">
+              <a:solidFill>
+                <a:schemeClr val="tx1"/>
+              </a:solidFill>
+            </a:endParaRPr>
+          </a:p>
+        </p:txBody>
+      </p:sp>
+      <p:sp>
+        <p:nvSpPr>
+          <p:cNvPr id="31" name="矢印: 折線 30">
+            <a:extLst>
+              <a:ext uri="{FF2B5EF4-FFF2-40B4-BE49-F238E27FC236}">
+                <a16:creationId xmlns:a16="http://schemas.microsoft.com/office/drawing/2014/main" id="{3F54C0ED-AE23-C8BF-2201-ACB20FD899C2}"/>
+              </a:ext>
+            </a:extLst>
+          </p:cNvPr>
+          <p:cNvSpPr/>
+          <p:nvPr/>
+        </p:nvSpPr>
+        <p:spPr>
+          <a:xfrm rot="16200000" flipH="1" flipV="1">
+            <a:off x="7069339" y="2461023"/>
+            <a:ext cx="882250" cy="935832"/>
+          </a:xfrm>
+          <a:prstGeom prst="bentArrow">
+            <a:avLst/>
+          </a:prstGeom>
+          <a:solidFill>
+            <a:srgbClr val="00B0F0"/>
+          </a:solidFill>
+          <a:ln>
+            <a:solidFill>
+              <a:schemeClr val="tx1"/>
+            </a:solidFill>
+          </a:ln>
+        </p:spPr>
+        <p:style>
+          <a:lnRef idx="2">
+            <a:schemeClr val="accent6">
+              <a:shade val="15000"/>
+            </a:schemeClr>
+          </a:lnRef>
+          <a:fillRef idx="1">
+            <a:schemeClr val="accent6"/>
+          </a:fillRef>
+          <a:effectRef idx="0">
+            <a:schemeClr val="accent6"/>
+          </a:effectRef>
+          <a:fontRef idx="minor">
+            <a:schemeClr val="lt1"/>
+          </a:fontRef>
+        </p:style>
+        <p:txBody>
+          <a:bodyPr rtlCol="0" anchor="ctr"/>
+          <a:lstStyle/>
+          <a:p>
+            <a:pPr algn="ctr"/>
+            <a:endParaRPr kumimoji="1" lang="ja-JP" altLang="en-US">
+              <a:solidFill>
+                <a:schemeClr val="tx1"/>
+              </a:solidFill>
+            </a:endParaRPr>
+          </a:p>
+        </p:txBody>
+      </p:sp>
+      <p:cxnSp>
+        <p:nvCxnSpPr>
+          <p:cNvPr id="32" name="直線コネクタ 31">
+            <a:extLst>
+              <a:ext uri="{FF2B5EF4-FFF2-40B4-BE49-F238E27FC236}">
+                <a16:creationId xmlns:a16="http://schemas.microsoft.com/office/drawing/2014/main" id="{24B2BEFB-7D68-FCC1-38F4-4280BB42B475}"/>
+              </a:ext>
+            </a:extLst>
+          </p:cNvPr>
+          <p:cNvCxnSpPr>
+            <a:cxnSpLocks/>
+          </p:cNvCxnSpPr>
+          <p:nvPr/>
+        </p:nvCxnSpPr>
+        <p:spPr>
+          <a:xfrm>
+            <a:off x="7267575" y="5708550"/>
+            <a:ext cx="588991" cy="543618"/>
+          </a:xfrm>
+          <a:prstGeom prst="line">
+            <a:avLst/>
+          </a:prstGeom>
+          <a:ln w="50800" cap="rnd">
+            <a:solidFill>
+              <a:schemeClr val="tx1"/>
+            </a:solidFill>
+            <a:round/>
+            <a:headEnd type="oval"/>
+            <a:tailEnd type="none"/>
+          </a:ln>
+        </p:spPr>
+        <p:style>
+          <a:lnRef idx="2">
+            <a:schemeClr val="accent1"/>
+          </a:lnRef>
+          <a:fillRef idx="0">
+            <a:schemeClr val="accent1"/>
+          </a:fillRef>
+          <a:effectRef idx="1">
+            <a:schemeClr val="accent1"/>
+          </a:effectRef>
+          <a:fontRef idx="minor">
+            <a:schemeClr val="tx1"/>
+          </a:fontRef>
+        </p:style>
+      </p:cxnSp>
+      <p:sp>
+        <p:nvSpPr>
+          <p:cNvPr id="34" name="テキスト ボックス 33">
+            <a:extLst>
+              <a:ext uri="{FF2B5EF4-FFF2-40B4-BE49-F238E27FC236}">
+                <a16:creationId xmlns:a16="http://schemas.microsoft.com/office/drawing/2014/main" id="{B9A21058-073F-0938-60DB-3E8A299B9973}"/>
+              </a:ext>
+            </a:extLst>
+          </p:cNvPr>
+          <p:cNvSpPr txBox="1"/>
+          <p:nvPr/>
+        </p:nvSpPr>
+        <p:spPr>
+          <a:xfrm>
+            <a:off x="7856567" y="6002436"/>
+            <a:ext cx="1668434" cy="461665"/>
+          </a:xfrm>
+          <a:prstGeom prst="rect">
+            <a:avLst/>
+          </a:prstGeom>
+          <a:noFill/>
+        </p:spPr>
+        <p:txBody>
+          <a:bodyPr wrap="square" rtlCol="0">
+            <a:spAutoFit/>
+          </a:bodyPr>
+          <a:lstStyle/>
+          <a:p>
+            <a:pPr algn="ctr"/>
+            <a:r>
+              <a:rPr lang="ja-JP" altLang="en-US" sz="2400" dirty="0"/>
+              <a:t>バス出力</a:t>
+            </a:r>
+            <a:endParaRPr kumimoji="1" lang="ja-JP" altLang="en-US" sz="2400" dirty="0"/>
+          </a:p>
+        </p:txBody>
+      </p:sp>
+      <p:cxnSp>
+        <p:nvCxnSpPr>
+          <p:cNvPr id="36" name="直線コネクタ 35">
+            <a:extLst>
+              <a:ext uri="{FF2B5EF4-FFF2-40B4-BE49-F238E27FC236}">
+                <a16:creationId xmlns:a16="http://schemas.microsoft.com/office/drawing/2014/main" id="{4184E138-1D64-BBD4-9DC7-0F0F4BD1417E}"/>
+              </a:ext>
+            </a:extLst>
+          </p:cNvPr>
+          <p:cNvCxnSpPr>
+            <a:cxnSpLocks/>
+            <a:endCxn id="38" idx="1"/>
+          </p:cNvCxnSpPr>
+          <p:nvPr/>
+        </p:nvCxnSpPr>
+        <p:spPr>
+          <a:xfrm flipV="1">
+            <a:off x="8074452" y="2191225"/>
+            <a:ext cx="1232662" cy="601981"/>
+          </a:xfrm>
+          <a:prstGeom prst="line">
+            <a:avLst/>
+          </a:prstGeom>
+          <a:ln w="50800" cap="rnd">
+            <a:solidFill>
+              <a:schemeClr val="tx1"/>
+            </a:solidFill>
+            <a:round/>
+            <a:headEnd type="oval"/>
+            <a:tailEnd type="none"/>
+          </a:ln>
+        </p:spPr>
+        <p:style>
+          <a:lnRef idx="2">
+            <a:schemeClr val="accent1"/>
+          </a:lnRef>
+          <a:fillRef idx="0">
+            <a:schemeClr val="accent1"/>
+          </a:fillRef>
+          <a:effectRef idx="1">
+            <a:schemeClr val="accent1"/>
+          </a:effectRef>
+          <a:fontRef idx="minor">
+            <a:schemeClr val="tx1"/>
+          </a:fontRef>
+        </p:style>
+      </p:cxnSp>
+      <p:sp>
+        <p:nvSpPr>
+          <p:cNvPr id="38" name="テキスト ボックス 37">
+            <a:extLst>
+              <a:ext uri="{FF2B5EF4-FFF2-40B4-BE49-F238E27FC236}">
+                <a16:creationId xmlns:a16="http://schemas.microsoft.com/office/drawing/2014/main" id="{0904C512-51A1-D4E5-E3FF-E81681FCB95F}"/>
+              </a:ext>
+            </a:extLst>
+          </p:cNvPr>
+          <p:cNvSpPr txBox="1"/>
+          <p:nvPr/>
+        </p:nvSpPr>
+        <p:spPr>
+          <a:xfrm>
+            <a:off x="9307114" y="1837282"/>
+            <a:ext cx="2358629" cy="707886"/>
+          </a:xfrm>
+          <a:prstGeom prst="rect">
+            <a:avLst/>
+          </a:prstGeom>
+          <a:noFill/>
+        </p:spPr>
+        <p:txBody>
+          <a:bodyPr wrap="square" rtlCol="0">
+            <a:spAutoFit/>
+          </a:bodyPr>
+          <a:lstStyle/>
+          <a:p>
+            <a:pPr algn="ctr"/>
+            <a:r>
+              <a:rPr lang="en-US" altLang="ja-JP" sz="2000" dirty="0">
+                <a:solidFill>
+                  <a:srgbClr val="00B050"/>
+                </a:solidFill>
+              </a:rPr>
+              <a:t>DCDC</a:t>
+            </a:r>
+            <a:r>
+              <a:rPr lang="ja-JP" altLang="en-US" sz="2000" dirty="0">
+                <a:solidFill>
+                  <a:srgbClr val="00B050"/>
+                </a:solidFill>
+              </a:rPr>
+              <a:t>コンバーターを介して変圧</a:t>
+            </a:r>
+            <a:endParaRPr kumimoji="1" lang="ja-JP" altLang="en-US" sz="2000" dirty="0">
+              <a:solidFill>
+                <a:srgbClr val="00B050"/>
+              </a:solidFill>
+            </a:endParaRPr>
+          </a:p>
+        </p:txBody>
+      </p:sp>
+      <p:cxnSp>
+        <p:nvCxnSpPr>
+          <p:cNvPr id="41" name="直線コネクタ 40">
+            <a:extLst>
+              <a:ext uri="{FF2B5EF4-FFF2-40B4-BE49-F238E27FC236}">
+                <a16:creationId xmlns:a16="http://schemas.microsoft.com/office/drawing/2014/main" id="{6C632557-F73F-673D-2B69-EAC9344816E0}"/>
+              </a:ext>
+            </a:extLst>
+          </p:cNvPr>
+          <p:cNvCxnSpPr>
+            <a:cxnSpLocks/>
+            <a:endCxn id="42" idx="3"/>
+          </p:cNvCxnSpPr>
+          <p:nvPr/>
+        </p:nvCxnSpPr>
+        <p:spPr>
+          <a:xfrm flipH="1" flipV="1">
+            <a:off x="2666999" y="4505920"/>
+            <a:ext cx="2399341" cy="724905"/>
+          </a:xfrm>
+          <a:prstGeom prst="line">
+            <a:avLst/>
+          </a:prstGeom>
+          <a:ln w="50800" cap="rnd">
+            <a:solidFill>
+              <a:schemeClr val="tx1"/>
+            </a:solidFill>
+            <a:round/>
+            <a:headEnd type="oval"/>
+            <a:tailEnd type="none"/>
+          </a:ln>
+        </p:spPr>
+        <p:style>
+          <a:lnRef idx="2">
+            <a:schemeClr val="accent1"/>
+          </a:lnRef>
+          <a:fillRef idx="0">
+            <a:schemeClr val="accent1"/>
+          </a:fillRef>
+          <a:effectRef idx="1">
+            <a:schemeClr val="accent1"/>
+          </a:effectRef>
+          <a:fontRef idx="minor">
+            <a:schemeClr val="tx1"/>
+          </a:fontRef>
+        </p:style>
+      </p:cxnSp>
+      <p:sp>
+        <p:nvSpPr>
+          <p:cNvPr id="42" name="テキスト ボックス 41">
+            <a:extLst>
+              <a:ext uri="{FF2B5EF4-FFF2-40B4-BE49-F238E27FC236}">
+                <a16:creationId xmlns:a16="http://schemas.microsoft.com/office/drawing/2014/main" id="{A47F77E0-1BB3-B63B-DD4A-B65CA2E68399}"/>
+              </a:ext>
+            </a:extLst>
+          </p:cNvPr>
+          <p:cNvSpPr txBox="1"/>
+          <p:nvPr/>
+        </p:nvSpPr>
+        <p:spPr>
+          <a:xfrm>
+            <a:off x="986971" y="4151977"/>
+            <a:ext cx="1680028" cy="707886"/>
+          </a:xfrm>
+          <a:prstGeom prst="rect">
+            <a:avLst/>
+          </a:prstGeom>
+          <a:noFill/>
+        </p:spPr>
+        <p:txBody>
+          <a:bodyPr wrap="square" rtlCol="0">
+            <a:spAutoFit/>
+          </a:bodyPr>
+          <a:lstStyle/>
+          <a:p>
+            <a:pPr algn="ctr"/>
+            <a:r>
+              <a:rPr lang="ja-JP" altLang="en-US" sz="2000" dirty="0">
+                <a:solidFill>
+                  <a:srgbClr val="00B050"/>
+                </a:solidFill>
+              </a:rPr>
+              <a:t>内部電源が入力される</a:t>
+            </a:r>
+            <a:endParaRPr lang="en-US" altLang="ja-JP" sz="2000" dirty="0">
+              <a:solidFill>
+                <a:srgbClr val="00B050"/>
+              </a:solidFill>
+            </a:endParaRPr>
+          </a:p>
+        </p:txBody>
+      </p:sp>
+      <p:sp>
+        <p:nvSpPr>
+          <p:cNvPr id="11" name="テキスト ボックス 10">
+            <a:extLst>
+              <a:ext uri="{FF2B5EF4-FFF2-40B4-BE49-F238E27FC236}">
+                <a16:creationId xmlns:a16="http://schemas.microsoft.com/office/drawing/2014/main" id="{51A28225-4EEB-641D-B078-D69999BFA1D5}"/>
+              </a:ext>
+            </a:extLst>
+          </p:cNvPr>
+          <p:cNvSpPr txBox="1"/>
+          <p:nvPr/>
+        </p:nvSpPr>
+        <p:spPr>
+          <a:xfrm>
+            <a:off x="-33963" y="855532"/>
+            <a:ext cx="3721895" cy="707886"/>
+          </a:xfrm>
+          <a:prstGeom prst="rect">
+            <a:avLst/>
+          </a:prstGeom>
+          <a:noFill/>
+        </p:spPr>
+        <p:txBody>
+          <a:bodyPr wrap="square" rtlCol="0">
+            <a:spAutoFit/>
+          </a:bodyPr>
+          <a:lstStyle/>
+          <a:p>
+            <a:pPr algn="ctr"/>
+            <a:r>
+              <a:rPr kumimoji="1" lang="en-US" altLang="ja-JP" sz="2000" dirty="0"/>
+              <a:t>Flight</a:t>
+            </a:r>
+            <a:r>
+              <a:rPr kumimoji="1" lang="ja-JP" altLang="en-US" sz="2000" dirty="0"/>
+              <a:t> </a:t>
+            </a:r>
+            <a:r>
+              <a:rPr kumimoji="1" lang="en-US" altLang="ja-JP" sz="2000" dirty="0" err="1"/>
+              <a:t>Mode:</a:t>
+            </a:r>
+            <a:r>
+              <a:rPr kumimoji="1" lang="en-US" altLang="ja-JP" dirty="0" err="1"/>
+              <a:t>READY_TO_FLY</a:t>
+            </a:r>
+            <a:endParaRPr kumimoji="1" lang="en-US" altLang="ja-JP" dirty="0"/>
+          </a:p>
+          <a:p>
+            <a:pPr algn="ctr"/>
+            <a:endParaRPr kumimoji="1" lang="ja-JP" altLang="en-US" sz="2000" dirty="0"/>
+          </a:p>
+        </p:txBody>
+      </p:sp>
+      <p:cxnSp>
+        <p:nvCxnSpPr>
+          <p:cNvPr id="12" name="直線コネクタ 11">
+            <a:extLst>
+              <a:ext uri="{FF2B5EF4-FFF2-40B4-BE49-F238E27FC236}">
+                <a16:creationId xmlns:a16="http://schemas.microsoft.com/office/drawing/2014/main" id="{C5F97554-3183-A3D8-719A-B58489D8B4EC}"/>
+              </a:ext>
+            </a:extLst>
+          </p:cNvPr>
+          <p:cNvCxnSpPr>
+            <a:cxnSpLocks/>
+          </p:cNvCxnSpPr>
+          <p:nvPr/>
+        </p:nvCxnSpPr>
+        <p:spPr>
+          <a:xfrm>
+            <a:off x="40662" y="1250424"/>
+            <a:ext cx="3464538" cy="0"/>
+          </a:xfrm>
+          <a:prstGeom prst="line">
+            <a:avLst/>
+          </a:prstGeom>
+          <a:ln w="38100"/>
+        </p:spPr>
+        <p:style>
+          <a:lnRef idx="2">
+            <a:schemeClr val="accent6"/>
+          </a:lnRef>
+          <a:fillRef idx="0">
+            <a:schemeClr val="accent6"/>
+          </a:fillRef>
+          <a:effectRef idx="1">
+            <a:schemeClr val="accent6"/>
+          </a:effectRef>
+          <a:fontRef idx="minor">
+            <a:schemeClr val="tx1"/>
+          </a:fontRef>
+        </p:style>
+      </p:cxnSp>
+      <p:cxnSp>
+        <p:nvCxnSpPr>
+          <p:cNvPr id="13" name="直線コネクタ 12">
+            <a:extLst>
+              <a:ext uri="{FF2B5EF4-FFF2-40B4-BE49-F238E27FC236}">
+                <a16:creationId xmlns:a16="http://schemas.microsoft.com/office/drawing/2014/main" id="{6DF5B8AE-4316-CF95-7090-4E9E5B2A2F87}"/>
+              </a:ext>
+            </a:extLst>
+          </p:cNvPr>
+          <p:cNvCxnSpPr>
+            <a:cxnSpLocks/>
+          </p:cNvCxnSpPr>
+          <p:nvPr/>
+        </p:nvCxnSpPr>
+        <p:spPr>
+          <a:xfrm>
+            <a:off x="40662" y="1317099"/>
+            <a:ext cx="3460728" cy="0"/>
+          </a:xfrm>
+          <a:prstGeom prst="line">
+            <a:avLst/>
+          </a:prstGeom>
+          <a:ln w="38100"/>
+        </p:spPr>
+        <p:style>
+          <a:lnRef idx="2">
+            <a:schemeClr val="accent6"/>
+          </a:lnRef>
+          <a:fillRef idx="0">
+            <a:schemeClr val="accent6"/>
+          </a:fillRef>
+          <a:effectRef idx="1">
+            <a:schemeClr val="accent6"/>
+          </a:effectRef>
+          <a:fontRef idx="minor">
+            <a:schemeClr val="tx1"/>
+          </a:fontRef>
+        </p:style>
+      </p:cxnSp>
+      <p:sp>
+        <p:nvSpPr>
+          <p:cNvPr id="21" name="矢印: 右 20">
+            <a:extLst>
+              <a:ext uri="{FF2B5EF4-FFF2-40B4-BE49-F238E27FC236}">
+                <a16:creationId xmlns:a16="http://schemas.microsoft.com/office/drawing/2014/main" id="{9FAFDC39-C975-70D4-CF2A-132FB82B01E4}"/>
+              </a:ext>
+            </a:extLst>
+          </p:cNvPr>
+          <p:cNvSpPr/>
+          <p:nvPr/>
+        </p:nvSpPr>
+        <p:spPr>
+          <a:xfrm rot="16200000">
+            <a:off x="4727973" y="4494877"/>
+            <a:ext cx="1200150" cy="514350"/>
+          </a:xfrm>
+          <a:prstGeom prst="rightArrow">
+            <a:avLst/>
+          </a:prstGeom>
+          <a:solidFill>
+            <a:srgbClr val="00B0F0"/>
+          </a:solidFill>
+          <a:ln>
+            <a:solidFill>
+              <a:schemeClr val="tx1"/>
+            </a:solidFill>
+          </a:ln>
+        </p:spPr>
+        <p:style>
+          <a:lnRef idx="2">
+            <a:schemeClr val="accent1">
+              <a:shade val="15000"/>
+            </a:schemeClr>
+          </a:lnRef>
+          <a:fillRef idx="1">
+            <a:schemeClr val="accent1"/>
+          </a:fillRef>
+          <a:effectRef idx="0">
+            <a:schemeClr val="accent1"/>
+          </a:effectRef>
+          <a:fontRef idx="minor">
+            <a:schemeClr val="lt1"/>
+          </a:fontRef>
+        </p:style>
+        <p:txBody>
+          <a:bodyPr rtlCol="0" anchor="ctr"/>
+          <a:lstStyle/>
+          <a:p>
+            <a:pPr algn="ctr"/>
+            <a:endParaRPr kumimoji="1" lang="ja-JP" altLang="en-US"/>
+          </a:p>
+        </p:txBody>
+      </p:sp>
+      <p:cxnSp>
+        <p:nvCxnSpPr>
+          <p:cNvPr id="23" name="直線コネクタ 22">
+            <a:extLst>
+              <a:ext uri="{FF2B5EF4-FFF2-40B4-BE49-F238E27FC236}">
+                <a16:creationId xmlns:a16="http://schemas.microsoft.com/office/drawing/2014/main" id="{0B185860-D4E8-24FA-89DF-736D7BAA4691}"/>
+              </a:ext>
+            </a:extLst>
+          </p:cNvPr>
+          <p:cNvCxnSpPr>
+            <a:cxnSpLocks/>
+            <a:endCxn id="25" idx="3"/>
+          </p:cNvCxnSpPr>
+          <p:nvPr/>
+        </p:nvCxnSpPr>
+        <p:spPr>
+          <a:xfrm flipH="1" flipV="1">
+            <a:off x="2734831" y="2545168"/>
+            <a:ext cx="3220608" cy="753067"/>
+          </a:xfrm>
+          <a:prstGeom prst="line">
+            <a:avLst/>
+          </a:prstGeom>
+          <a:ln w="50800" cap="rnd">
+            <a:solidFill>
+              <a:schemeClr val="tx1"/>
+            </a:solidFill>
+            <a:round/>
+            <a:headEnd type="oval"/>
+            <a:tailEnd type="none"/>
+          </a:ln>
+        </p:spPr>
+        <p:style>
+          <a:lnRef idx="2">
+            <a:schemeClr val="accent1"/>
+          </a:lnRef>
+          <a:fillRef idx="0">
+            <a:schemeClr val="accent1"/>
+          </a:fillRef>
+          <a:effectRef idx="1">
+            <a:schemeClr val="accent1"/>
+          </a:effectRef>
+          <a:fontRef idx="minor">
+            <a:schemeClr val="tx1"/>
+          </a:fontRef>
+        </p:style>
+      </p:cxnSp>
+      <p:sp>
+        <p:nvSpPr>
+          <p:cNvPr id="25" name="テキスト ボックス 24">
+            <a:extLst>
+              <a:ext uri="{FF2B5EF4-FFF2-40B4-BE49-F238E27FC236}">
+                <a16:creationId xmlns:a16="http://schemas.microsoft.com/office/drawing/2014/main" id="{1C7CC8E7-143B-9EAD-0991-01E4DBA24FEA}"/>
+              </a:ext>
+            </a:extLst>
+          </p:cNvPr>
+          <p:cNvSpPr txBox="1"/>
+          <p:nvPr/>
+        </p:nvSpPr>
+        <p:spPr>
+          <a:xfrm>
+            <a:off x="212445" y="2191225"/>
+            <a:ext cx="2522386" cy="707886"/>
+          </a:xfrm>
+          <a:prstGeom prst="rect">
+            <a:avLst/>
+          </a:prstGeom>
+          <a:noFill/>
+        </p:spPr>
+        <p:txBody>
+          <a:bodyPr wrap="square" rtlCol="0">
+            <a:spAutoFit/>
+          </a:bodyPr>
+          <a:lstStyle/>
+          <a:p>
+            <a:pPr algn="ctr"/>
+            <a:r>
+              <a:rPr lang="en-US" altLang="ja-JP" sz="2000" dirty="0">
+                <a:solidFill>
+                  <a:srgbClr val="00B050"/>
+                </a:solidFill>
+              </a:rPr>
+              <a:t>LTC4353</a:t>
+            </a:r>
+            <a:r>
+              <a:rPr lang="ja-JP" altLang="en-US" sz="2000" dirty="0">
+                <a:solidFill>
+                  <a:srgbClr val="00B050"/>
+                </a:solidFill>
+              </a:rPr>
+              <a:t>により高電圧側が優先される</a:t>
+            </a:r>
+            <a:endParaRPr lang="en-US" altLang="ja-JP" sz="2000" dirty="0">
+              <a:solidFill>
+                <a:srgbClr val="00B050"/>
+              </a:solidFill>
+            </a:endParaRPr>
+          </a:p>
+        </p:txBody>
+      </p:sp>
+      <p:sp>
+        <p:nvSpPr>
+          <p:cNvPr id="39" name="テキスト ボックス 38">
+            <a:extLst>
+              <a:ext uri="{FF2B5EF4-FFF2-40B4-BE49-F238E27FC236}">
+                <a16:creationId xmlns:a16="http://schemas.microsoft.com/office/drawing/2014/main" id="{D7CA2432-CCBF-AB82-82D0-06251552E829}"/>
+              </a:ext>
+            </a:extLst>
+          </p:cNvPr>
+          <p:cNvSpPr txBox="1"/>
+          <p:nvPr/>
+        </p:nvSpPr>
+        <p:spPr>
+          <a:xfrm>
+            <a:off x="4969430" y="280357"/>
+            <a:ext cx="822960" cy="369332"/>
+          </a:xfrm>
+          <a:prstGeom prst="rect">
+            <a:avLst/>
+          </a:prstGeom>
+          <a:noFill/>
+        </p:spPr>
+        <p:txBody>
+          <a:bodyPr wrap="square" rtlCol="0">
+            <a:spAutoFit/>
+          </a:bodyPr>
+          <a:lstStyle/>
+          <a:p>
+            <a:pPr algn="ctr"/>
+            <a:r>
+              <a:rPr kumimoji="1" lang="en-US" altLang="ja-JP" b="1" dirty="0"/>
+              <a:t>17 V</a:t>
+            </a:r>
+            <a:endParaRPr kumimoji="1" lang="ja-JP" altLang="en-US" b="1" dirty="0"/>
+          </a:p>
+        </p:txBody>
+      </p:sp>
+      <p:sp>
+        <p:nvSpPr>
+          <p:cNvPr id="40" name="テキスト ボックス 39">
+            <a:extLst>
+              <a:ext uri="{FF2B5EF4-FFF2-40B4-BE49-F238E27FC236}">
+                <a16:creationId xmlns:a16="http://schemas.microsoft.com/office/drawing/2014/main" id="{8F989229-AC06-75FE-25BF-40124A8C1140}"/>
+              </a:ext>
+            </a:extLst>
+          </p:cNvPr>
+          <p:cNvSpPr txBox="1"/>
+          <p:nvPr/>
+        </p:nvSpPr>
+        <p:spPr>
+          <a:xfrm>
+            <a:off x="5249055" y="6125119"/>
+            <a:ext cx="1106502" cy="369332"/>
+          </a:xfrm>
+          <a:prstGeom prst="rect">
+            <a:avLst/>
+          </a:prstGeom>
+          <a:noFill/>
+        </p:spPr>
+        <p:txBody>
+          <a:bodyPr wrap="square" rtlCol="0">
+            <a:spAutoFit/>
+          </a:bodyPr>
+          <a:lstStyle/>
+          <a:p>
+            <a:pPr algn="ctr"/>
+            <a:r>
+              <a:rPr lang="en-US" altLang="ja-JP" b="1" dirty="0"/>
+              <a:t>12.8</a:t>
+            </a:r>
+            <a:r>
+              <a:rPr kumimoji="1" lang="en-US" altLang="ja-JP" b="1" dirty="0"/>
+              <a:t> V</a:t>
+            </a:r>
+            <a:endParaRPr kumimoji="1" lang="ja-JP" altLang="en-US" b="1" dirty="0"/>
+          </a:p>
+        </p:txBody>
+      </p:sp>
+    </p:spTree>
+    <p:extLst>
+      <p:ext uri="{BB962C8B-B14F-4D97-AF65-F5344CB8AC3E}">
+        <p14:creationId xmlns:p14="http://schemas.microsoft.com/office/powerpoint/2010/main" val="2722884589"/>
+      </p:ext>
+    </p:extLst>
+  </p:cSld>
+  <p:clrMapOvr>
+    <a:masterClrMapping/>
+  </p:clrMapOvr>
+</p:sld>
+</file>
+
+<file path=ppt/slides/slide5.xml><?xml version="1.0" encoding="utf-8"?>
+<p:sld xmlns:a="http://schemas.openxmlformats.org/drawingml/2006/main" xmlns:r="http://schemas.openxmlformats.org/officeDocument/2006/relationships" xmlns:p="http://schemas.openxmlformats.org/presentationml/2006/main">
+  <p:cSld>
+    <p:spTree>
+      <p:nvGrpSpPr>
+        <p:cNvPr id="1" name="">
+          <a:extLst>
+            <a:ext uri="{FF2B5EF4-FFF2-40B4-BE49-F238E27FC236}">
+              <a16:creationId xmlns:a16="http://schemas.microsoft.com/office/drawing/2014/main" id="{D6A398AB-9EDB-6EED-628F-F9FC7B2C0FDF}"/>
+            </a:ext>
+          </a:extLst>
+        </p:cNvPr>
+        <p:cNvGrpSpPr/>
+        <p:nvPr/>
+      </p:nvGrpSpPr>
+      <p:grpSpPr>
+        <a:xfrm>
+          <a:off x="0" y="0"/>
+          <a:ext cx="0" cy="0"/>
+          <a:chOff x="0" y="0"/>
+          <a:chExt cx="0" cy="0"/>
+        </a:xfrm>
+      </p:grpSpPr>
+      <p:pic>
+        <p:nvPicPr>
+          <p:cNvPr id="4" name="図 3" descr="グラフィカル ユーザー インターフェイス が含まれている画像&#10;&#10;AI 生成コンテンツは誤りを含む可能性があります。">
+            <a:extLst>
+              <a:ext uri="{FF2B5EF4-FFF2-40B4-BE49-F238E27FC236}">
+                <a16:creationId xmlns:a16="http://schemas.microsoft.com/office/drawing/2014/main" id="{90377294-040D-2E6A-B905-22E65ED041BD}"/>
+              </a:ext>
+            </a:extLst>
+          </p:cNvPr>
+          <p:cNvPicPr>
+            <a:picLocks noGrp="1" noRot="1" noChangeAspect="1" noMove="1" noResize="1" noEditPoints="1" noAdjustHandles="1" noChangeArrowheads="1" noChangeShapeType="1" noCrop="1"/>
+          </p:cNvPicPr>
+          <p:nvPr/>
+        </p:nvPicPr>
+        <p:blipFill>
+          <a:blip r:embed="rId2">
+            <a:extLst>
+              <a:ext uri="{28A0092B-C50C-407E-A947-70E740481C1C}">
+                <a14:useLocalDpi xmlns:a14="http://schemas.microsoft.com/office/drawing/2010/main" val="0"/>
+              </a:ext>
+            </a:extLst>
+          </a:blip>
+          <a:stretch>
+            <a:fillRect/>
+          </a:stretch>
+        </p:blipFill>
+        <p:spPr>
+          <a:xfrm>
+            <a:off x="2667000" y="0"/>
+            <a:ext cx="6858000" cy="6858000"/>
+          </a:xfrm>
+          <a:prstGeom prst="rect">
+            <a:avLst/>
+          </a:prstGeom>
+        </p:spPr>
+      </p:pic>
+      <p:cxnSp>
+        <p:nvCxnSpPr>
+          <p:cNvPr id="7" name="直線コネクタ 6">
+            <a:extLst>
+              <a:ext uri="{FF2B5EF4-FFF2-40B4-BE49-F238E27FC236}">
+                <a16:creationId xmlns:a16="http://schemas.microsoft.com/office/drawing/2014/main" id="{14E6A142-F51D-6665-F178-63B18CB0A9AD}"/>
+              </a:ext>
+            </a:extLst>
+          </p:cNvPr>
+          <p:cNvCxnSpPr>
+            <a:cxnSpLocks/>
+            <a:endCxn id="8" idx="3"/>
+          </p:cNvCxnSpPr>
+          <p:nvPr/>
+        </p:nvCxnSpPr>
+        <p:spPr>
+          <a:xfrm flipH="1">
+            <a:off x="4722019" y="5822156"/>
+            <a:ext cx="328612" cy="430013"/>
+          </a:xfrm>
+          <a:prstGeom prst="line">
+            <a:avLst/>
+          </a:prstGeom>
+          <a:ln w="50800" cap="rnd">
+            <a:solidFill>
+              <a:schemeClr val="tx1"/>
+            </a:solidFill>
+            <a:round/>
+            <a:headEnd type="oval"/>
+            <a:tailEnd type="none"/>
+          </a:ln>
+        </p:spPr>
+        <p:style>
+          <a:lnRef idx="2">
+            <a:schemeClr val="accent1"/>
+          </a:lnRef>
+          <a:fillRef idx="0">
+            <a:schemeClr val="accent1"/>
+          </a:fillRef>
+          <a:effectRef idx="1">
+            <a:schemeClr val="accent1"/>
+          </a:effectRef>
+          <a:fontRef idx="minor">
+            <a:schemeClr val="tx1"/>
+          </a:fontRef>
+        </p:style>
+      </p:cxnSp>
+      <p:sp>
+        <p:nvSpPr>
+          <p:cNvPr id="8" name="テキスト ボックス 7">
+            <a:extLst>
+              <a:ext uri="{FF2B5EF4-FFF2-40B4-BE49-F238E27FC236}">
+                <a16:creationId xmlns:a16="http://schemas.microsoft.com/office/drawing/2014/main" id="{4D68F5D3-A516-A76E-6DB9-8984F43A3BE8}"/>
+              </a:ext>
+            </a:extLst>
+          </p:cNvPr>
+          <p:cNvSpPr txBox="1"/>
+          <p:nvPr/>
+        </p:nvSpPr>
+        <p:spPr>
+          <a:xfrm>
+            <a:off x="2563048" y="6021336"/>
+            <a:ext cx="2158971" cy="461665"/>
+          </a:xfrm>
+          <a:prstGeom prst="rect">
+            <a:avLst/>
+          </a:prstGeom>
+          <a:noFill/>
+        </p:spPr>
+        <p:txBody>
+          <a:bodyPr wrap="square" rtlCol="0">
+            <a:spAutoFit/>
+          </a:bodyPr>
+          <a:lstStyle/>
+          <a:p>
+            <a:pPr algn="ctr"/>
+            <a:r>
+              <a:rPr lang="ja-JP" altLang="en-US" sz="2400" dirty="0"/>
+              <a:t>内部電源</a:t>
+            </a:r>
+            <a:r>
+              <a:rPr kumimoji="1" lang="ja-JP" altLang="en-US" sz="2400" dirty="0"/>
+              <a:t>入力</a:t>
+            </a:r>
+          </a:p>
+        </p:txBody>
+      </p:sp>
+      <p:sp>
+        <p:nvSpPr>
+          <p:cNvPr id="28" name="矢印: 折線 27">
+            <a:extLst>
+              <a:ext uri="{FF2B5EF4-FFF2-40B4-BE49-F238E27FC236}">
+                <a16:creationId xmlns:a16="http://schemas.microsoft.com/office/drawing/2014/main" id="{88B8B4F5-6ED8-8F46-273A-C34E20B14C54}"/>
+              </a:ext>
+            </a:extLst>
+          </p:cNvPr>
+          <p:cNvSpPr/>
+          <p:nvPr/>
+        </p:nvSpPr>
+        <p:spPr>
+          <a:xfrm>
+            <a:off x="5249055" y="3046811"/>
+            <a:ext cx="1914525" cy="935832"/>
+          </a:xfrm>
+          <a:prstGeom prst="bentArrow">
+            <a:avLst/>
+          </a:prstGeom>
+          <a:solidFill>
+            <a:srgbClr val="00B0F0"/>
+          </a:solidFill>
+          <a:ln>
+            <a:solidFill>
+              <a:schemeClr val="tx1"/>
+            </a:solidFill>
+          </a:ln>
+        </p:spPr>
+        <p:style>
+          <a:lnRef idx="2">
+            <a:schemeClr val="accent6">
+              <a:shade val="15000"/>
+            </a:schemeClr>
+          </a:lnRef>
+          <a:fillRef idx="1">
+            <a:schemeClr val="accent6"/>
+          </a:fillRef>
+          <a:effectRef idx="0">
+            <a:schemeClr val="accent6"/>
+          </a:effectRef>
+          <a:fontRef idx="minor">
+            <a:schemeClr val="lt1"/>
+          </a:fontRef>
+        </p:style>
+        <p:txBody>
+          <a:bodyPr rtlCol="0" anchor="ctr"/>
+          <a:lstStyle/>
+          <a:p>
+            <a:pPr algn="ctr"/>
+            <a:endParaRPr kumimoji="1" lang="ja-JP" altLang="en-US">
+              <a:solidFill>
+                <a:schemeClr val="tx1"/>
+              </a:solidFill>
+            </a:endParaRPr>
+          </a:p>
+        </p:txBody>
+      </p:sp>
+      <p:sp>
+        <p:nvSpPr>
+          <p:cNvPr id="29" name="矢印: 右 28">
+            <a:extLst>
+              <a:ext uri="{FF2B5EF4-FFF2-40B4-BE49-F238E27FC236}">
+                <a16:creationId xmlns:a16="http://schemas.microsoft.com/office/drawing/2014/main" id="{F4A3BAF6-8316-2D22-8EAF-F9F5EBD9C3A0}"/>
+              </a:ext>
+            </a:extLst>
+          </p:cNvPr>
+          <p:cNvSpPr/>
+          <p:nvPr/>
+        </p:nvSpPr>
+        <p:spPr>
+          <a:xfrm rot="5400000">
+            <a:off x="6434138" y="5450682"/>
+            <a:ext cx="1200150" cy="514350"/>
+          </a:xfrm>
+          <a:prstGeom prst="rightArrow">
+            <a:avLst/>
+          </a:prstGeom>
+          <a:solidFill>
+            <a:srgbClr val="00B0F0"/>
+          </a:solidFill>
+          <a:ln>
+            <a:solidFill>
+              <a:schemeClr val="tx1"/>
+            </a:solidFill>
+          </a:ln>
+        </p:spPr>
+        <p:style>
+          <a:lnRef idx="2">
+            <a:schemeClr val="accent1">
+              <a:shade val="15000"/>
+            </a:schemeClr>
+          </a:lnRef>
+          <a:fillRef idx="1">
+            <a:schemeClr val="accent1"/>
+          </a:fillRef>
+          <a:effectRef idx="0">
+            <a:schemeClr val="accent1"/>
+          </a:effectRef>
+          <a:fontRef idx="minor">
+            <a:schemeClr val="lt1"/>
+          </a:fontRef>
+        </p:style>
+        <p:txBody>
+          <a:bodyPr rtlCol="0" anchor="ctr"/>
+          <a:lstStyle/>
+          <a:p>
+            <a:pPr algn="ctr"/>
+            <a:endParaRPr kumimoji="1" lang="ja-JP" altLang="en-US"/>
+          </a:p>
+        </p:txBody>
+      </p:sp>
+      <p:sp>
+        <p:nvSpPr>
+          <p:cNvPr id="30" name="矢印: 折線 29">
+            <a:extLst>
+              <a:ext uri="{FF2B5EF4-FFF2-40B4-BE49-F238E27FC236}">
+                <a16:creationId xmlns:a16="http://schemas.microsoft.com/office/drawing/2014/main" id="{B14FA38F-874E-A78D-6409-B67DE34551AA}"/>
+              </a:ext>
+            </a:extLst>
+          </p:cNvPr>
+          <p:cNvSpPr/>
+          <p:nvPr/>
+        </p:nvSpPr>
+        <p:spPr>
+          <a:xfrm rot="5400000" flipV="1">
+            <a:off x="6382348" y="4038004"/>
+            <a:ext cx="882250" cy="935832"/>
+          </a:xfrm>
+          <a:prstGeom prst="bentArrow">
+            <a:avLst/>
+          </a:prstGeom>
+          <a:solidFill>
+            <a:srgbClr val="00B0F0"/>
+          </a:solidFill>
+          <a:ln>
+            <a:solidFill>
+              <a:schemeClr val="tx1"/>
+            </a:solidFill>
+          </a:ln>
+        </p:spPr>
+        <p:style>
+          <a:lnRef idx="2">
+            <a:schemeClr val="accent6">
+              <a:shade val="15000"/>
+            </a:schemeClr>
+          </a:lnRef>
+          <a:fillRef idx="1">
+            <a:schemeClr val="accent6"/>
+          </a:fillRef>
+          <a:effectRef idx="0">
+            <a:schemeClr val="accent6"/>
+          </a:effectRef>
+          <a:fontRef idx="minor">
+            <a:schemeClr val="lt1"/>
+          </a:fontRef>
+        </p:style>
+        <p:txBody>
+          <a:bodyPr rtlCol="0" anchor="ctr"/>
+          <a:lstStyle/>
+          <a:p>
+            <a:pPr algn="ctr"/>
+            <a:endParaRPr kumimoji="1" lang="ja-JP" altLang="en-US">
+              <a:solidFill>
+                <a:schemeClr val="tx1"/>
+              </a:solidFill>
+            </a:endParaRPr>
+          </a:p>
+        </p:txBody>
+      </p:sp>
+      <p:sp>
+        <p:nvSpPr>
+          <p:cNvPr id="31" name="矢印: 折線 30">
+            <a:extLst>
+              <a:ext uri="{FF2B5EF4-FFF2-40B4-BE49-F238E27FC236}">
+                <a16:creationId xmlns:a16="http://schemas.microsoft.com/office/drawing/2014/main" id="{A4A57054-ACC2-1D54-8D61-69CF9374E3D5}"/>
+              </a:ext>
+            </a:extLst>
+          </p:cNvPr>
+          <p:cNvSpPr/>
+          <p:nvPr/>
+        </p:nvSpPr>
+        <p:spPr>
+          <a:xfrm rot="16200000" flipH="1" flipV="1">
+            <a:off x="7170281" y="3279796"/>
+            <a:ext cx="882250" cy="687748"/>
+          </a:xfrm>
+          <a:prstGeom prst="bentArrow">
+            <a:avLst/>
+          </a:prstGeom>
+          <a:solidFill>
+            <a:srgbClr val="00B0F0"/>
+          </a:solidFill>
+          <a:ln>
+            <a:solidFill>
+              <a:schemeClr val="tx1"/>
+            </a:solidFill>
+          </a:ln>
+        </p:spPr>
+        <p:style>
+          <a:lnRef idx="2">
+            <a:schemeClr val="accent6">
+              <a:shade val="15000"/>
+            </a:schemeClr>
+          </a:lnRef>
+          <a:fillRef idx="1">
+            <a:schemeClr val="accent6"/>
+          </a:fillRef>
+          <a:effectRef idx="0">
+            <a:schemeClr val="accent6"/>
+          </a:effectRef>
+          <a:fontRef idx="minor">
+            <a:schemeClr val="lt1"/>
+          </a:fontRef>
+        </p:style>
+        <p:txBody>
+          <a:bodyPr rtlCol="0" anchor="ctr"/>
+          <a:lstStyle/>
+          <a:p>
+            <a:pPr algn="ctr"/>
+            <a:endParaRPr kumimoji="1" lang="ja-JP" altLang="en-US">
+              <a:solidFill>
+                <a:schemeClr val="tx1"/>
+              </a:solidFill>
+            </a:endParaRPr>
+          </a:p>
+        </p:txBody>
+      </p:sp>
+      <p:cxnSp>
+        <p:nvCxnSpPr>
+          <p:cNvPr id="32" name="直線コネクタ 31">
+            <a:extLst>
+              <a:ext uri="{FF2B5EF4-FFF2-40B4-BE49-F238E27FC236}">
+                <a16:creationId xmlns:a16="http://schemas.microsoft.com/office/drawing/2014/main" id="{9130534E-BFC9-9027-E905-7DD6DF33000E}"/>
+              </a:ext>
+            </a:extLst>
+          </p:cNvPr>
+          <p:cNvCxnSpPr>
+            <a:cxnSpLocks/>
+          </p:cNvCxnSpPr>
+          <p:nvPr/>
+        </p:nvCxnSpPr>
+        <p:spPr>
+          <a:xfrm>
+            <a:off x="7267575" y="5708550"/>
+            <a:ext cx="588991" cy="543618"/>
+          </a:xfrm>
+          <a:prstGeom prst="line">
+            <a:avLst/>
+          </a:prstGeom>
+          <a:ln w="50800" cap="rnd">
+            <a:solidFill>
+              <a:schemeClr val="tx1"/>
+            </a:solidFill>
+            <a:round/>
+            <a:headEnd type="oval"/>
+            <a:tailEnd type="none"/>
+          </a:ln>
+        </p:spPr>
+        <p:style>
+          <a:lnRef idx="2">
+            <a:schemeClr val="accent1"/>
+          </a:lnRef>
+          <a:fillRef idx="0">
+            <a:schemeClr val="accent1"/>
+          </a:fillRef>
+          <a:effectRef idx="1">
+            <a:schemeClr val="accent1"/>
+          </a:effectRef>
+          <a:fontRef idx="minor">
+            <a:schemeClr val="tx1"/>
+          </a:fontRef>
+        </p:style>
+      </p:cxnSp>
+      <p:sp>
+        <p:nvSpPr>
+          <p:cNvPr id="34" name="テキスト ボックス 33">
+            <a:extLst>
+              <a:ext uri="{FF2B5EF4-FFF2-40B4-BE49-F238E27FC236}">
+                <a16:creationId xmlns:a16="http://schemas.microsoft.com/office/drawing/2014/main" id="{98B38452-46AE-887C-0959-AC9701540AAE}"/>
+              </a:ext>
+            </a:extLst>
+          </p:cNvPr>
+          <p:cNvSpPr txBox="1"/>
+          <p:nvPr/>
+        </p:nvSpPr>
+        <p:spPr>
+          <a:xfrm>
+            <a:off x="7856567" y="6002436"/>
+            <a:ext cx="1668434" cy="461665"/>
+          </a:xfrm>
+          <a:prstGeom prst="rect">
+            <a:avLst/>
+          </a:prstGeom>
+          <a:noFill/>
+        </p:spPr>
+        <p:txBody>
+          <a:bodyPr wrap="square" rtlCol="0">
+            <a:spAutoFit/>
+          </a:bodyPr>
+          <a:lstStyle/>
+          <a:p>
+            <a:pPr algn="ctr"/>
+            <a:r>
+              <a:rPr lang="ja-JP" altLang="en-US" sz="2400" dirty="0"/>
+              <a:t>バス出力</a:t>
+            </a:r>
+            <a:endParaRPr kumimoji="1" lang="ja-JP" altLang="en-US" sz="2400" dirty="0"/>
+          </a:p>
+        </p:txBody>
+      </p:sp>
+      <p:cxnSp>
+        <p:nvCxnSpPr>
+          <p:cNvPr id="36" name="直線コネクタ 35">
+            <a:extLst>
+              <a:ext uri="{FF2B5EF4-FFF2-40B4-BE49-F238E27FC236}">
+                <a16:creationId xmlns:a16="http://schemas.microsoft.com/office/drawing/2014/main" id="{ABC78072-5D38-3CF8-E695-EB4F7287339D}"/>
+              </a:ext>
+            </a:extLst>
+          </p:cNvPr>
+          <p:cNvCxnSpPr>
+            <a:cxnSpLocks/>
+            <a:endCxn id="38" idx="1"/>
+          </p:cNvCxnSpPr>
+          <p:nvPr/>
+        </p:nvCxnSpPr>
+        <p:spPr>
+          <a:xfrm flipV="1">
+            <a:off x="8074452" y="2191225"/>
+            <a:ext cx="1232662" cy="601981"/>
+          </a:xfrm>
+          <a:prstGeom prst="line">
+            <a:avLst/>
+          </a:prstGeom>
+          <a:ln w="50800" cap="rnd">
+            <a:solidFill>
+              <a:schemeClr val="tx1"/>
+            </a:solidFill>
+            <a:round/>
+            <a:headEnd type="oval"/>
+            <a:tailEnd type="none"/>
+          </a:ln>
+        </p:spPr>
+        <p:style>
+          <a:lnRef idx="2">
+            <a:schemeClr val="accent1"/>
+          </a:lnRef>
+          <a:fillRef idx="0">
+            <a:schemeClr val="accent1"/>
+          </a:fillRef>
+          <a:effectRef idx="1">
+            <a:schemeClr val="accent1"/>
+          </a:effectRef>
+          <a:fontRef idx="minor">
+            <a:schemeClr val="tx1"/>
+          </a:fontRef>
+        </p:style>
+      </p:cxnSp>
+      <p:sp>
+        <p:nvSpPr>
+          <p:cNvPr id="38" name="テキスト ボックス 37">
+            <a:extLst>
+              <a:ext uri="{FF2B5EF4-FFF2-40B4-BE49-F238E27FC236}">
+                <a16:creationId xmlns:a16="http://schemas.microsoft.com/office/drawing/2014/main" id="{43C4530D-000C-B654-2D86-2A5A99D9133D}"/>
+              </a:ext>
+            </a:extLst>
+          </p:cNvPr>
+          <p:cNvSpPr txBox="1"/>
+          <p:nvPr/>
+        </p:nvSpPr>
+        <p:spPr>
+          <a:xfrm>
+            <a:off x="9307114" y="1837282"/>
+            <a:ext cx="2358629" cy="707886"/>
+          </a:xfrm>
+          <a:prstGeom prst="rect">
+            <a:avLst/>
+          </a:prstGeom>
+          <a:noFill/>
+        </p:spPr>
+        <p:txBody>
+          <a:bodyPr wrap="square" rtlCol="0">
+            <a:spAutoFit/>
+          </a:bodyPr>
+          <a:lstStyle/>
+          <a:p>
+            <a:pPr algn="ctr"/>
+            <a:r>
+              <a:rPr lang="en-US" altLang="ja-JP" sz="2000" dirty="0">
+                <a:solidFill>
+                  <a:srgbClr val="00B050"/>
+                </a:solidFill>
+              </a:rPr>
+              <a:t>DCDC</a:t>
+            </a:r>
+            <a:r>
+              <a:rPr lang="ja-JP" altLang="en-US" sz="2000" dirty="0">
+                <a:solidFill>
+                  <a:srgbClr val="00B050"/>
+                </a:solidFill>
+              </a:rPr>
+              <a:t>コンバーターを介して変圧</a:t>
+            </a:r>
+            <a:endParaRPr kumimoji="1" lang="ja-JP" altLang="en-US" sz="2000" dirty="0">
+              <a:solidFill>
+                <a:srgbClr val="00B050"/>
+              </a:solidFill>
+            </a:endParaRPr>
+          </a:p>
+        </p:txBody>
+      </p:sp>
+      <p:cxnSp>
+        <p:nvCxnSpPr>
+          <p:cNvPr id="41" name="直線コネクタ 40">
+            <a:extLst>
+              <a:ext uri="{FF2B5EF4-FFF2-40B4-BE49-F238E27FC236}">
+                <a16:creationId xmlns:a16="http://schemas.microsoft.com/office/drawing/2014/main" id="{55CE48E7-4AB4-D9F6-74A7-C9E67BF094D1}"/>
+              </a:ext>
+            </a:extLst>
+          </p:cNvPr>
+          <p:cNvCxnSpPr>
+            <a:cxnSpLocks/>
+            <a:endCxn id="42" idx="3"/>
+          </p:cNvCxnSpPr>
+          <p:nvPr/>
+        </p:nvCxnSpPr>
+        <p:spPr>
+          <a:xfrm flipH="1" flipV="1">
+            <a:off x="2666999" y="4505920"/>
+            <a:ext cx="2399341" cy="724905"/>
+          </a:xfrm>
+          <a:prstGeom prst="line">
+            <a:avLst/>
+          </a:prstGeom>
+          <a:ln w="50800" cap="rnd">
+            <a:solidFill>
+              <a:schemeClr val="tx1"/>
+            </a:solidFill>
+            <a:round/>
+            <a:headEnd type="oval"/>
+            <a:tailEnd type="none"/>
+          </a:ln>
+        </p:spPr>
+        <p:style>
+          <a:lnRef idx="2">
+            <a:schemeClr val="accent1"/>
+          </a:lnRef>
+          <a:fillRef idx="0">
+            <a:schemeClr val="accent1"/>
+          </a:fillRef>
+          <a:effectRef idx="1">
+            <a:schemeClr val="accent1"/>
+          </a:effectRef>
+          <a:fontRef idx="minor">
+            <a:schemeClr val="tx1"/>
+          </a:fontRef>
+        </p:style>
+      </p:cxnSp>
+      <p:sp>
+        <p:nvSpPr>
+          <p:cNvPr id="42" name="テキスト ボックス 41">
+            <a:extLst>
+              <a:ext uri="{FF2B5EF4-FFF2-40B4-BE49-F238E27FC236}">
+                <a16:creationId xmlns:a16="http://schemas.microsoft.com/office/drawing/2014/main" id="{2135B107-EC78-2A2C-BA8F-BC2B20FB36CF}"/>
+              </a:ext>
+            </a:extLst>
+          </p:cNvPr>
+          <p:cNvSpPr txBox="1"/>
+          <p:nvPr/>
+        </p:nvSpPr>
+        <p:spPr>
+          <a:xfrm>
+            <a:off x="986971" y="4151977"/>
+            <a:ext cx="1680028" cy="707886"/>
+          </a:xfrm>
+          <a:prstGeom prst="rect">
+            <a:avLst/>
+          </a:prstGeom>
+          <a:noFill/>
+        </p:spPr>
+        <p:txBody>
+          <a:bodyPr wrap="square" rtlCol="0">
+            <a:spAutoFit/>
+          </a:bodyPr>
+          <a:lstStyle/>
+          <a:p>
+            <a:pPr algn="ctr"/>
+            <a:r>
+              <a:rPr lang="ja-JP" altLang="en-US" sz="2000" dirty="0">
+                <a:solidFill>
+                  <a:srgbClr val="00B050"/>
+                </a:solidFill>
+              </a:rPr>
+              <a:t>内部電源が入力される</a:t>
+            </a:r>
+            <a:endParaRPr lang="en-US" altLang="ja-JP" sz="2000" dirty="0">
+              <a:solidFill>
+                <a:srgbClr val="00B050"/>
+              </a:solidFill>
+            </a:endParaRPr>
+          </a:p>
+        </p:txBody>
+      </p:sp>
+      <p:sp>
+        <p:nvSpPr>
+          <p:cNvPr id="11" name="テキスト ボックス 10">
+            <a:extLst>
+              <a:ext uri="{FF2B5EF4-FFF2-40B4-BE49-F238E27FC236}">
+                <a16:creationId xmlns:a16="http://schemas.microsoft.com/office/drawing/2014/main" id="{0ACF4902-048A-41B8-2537-8B1EB0C5A9C1}"/>
+              </a:ext>
+            </a:extLst>
+          </p:cNvPr>
+          <p:cNvSpPr txBox="1"/>
+          <p:nvPr/>
+        </p:nvSpPr>
+        <p:spPr>
+          <a:xfrm>
+            <a:off x="1150620" y="843488"/>
+            <a:ext cx="2057252" cy="400110"/>
+          </a:xfrm>
+          <a:prstGeom prst="rect">
+            <a:avLst/>
+          </a:prstGeom>
+          <a:noFill/>
+        </p:spPr>
+        <p:txBody>
+          <a:bodyPr wrap="square" rtlCol="0">
+            <a:spAutoFit/>
+          </a:bodyPr>
+          <a:lstStyle/>
+          <a:p>
+            <a:pPr algn="ctr"/>
+            <a:r>
+              <a:rPr kumimoji="1" lang="ja-JP" altLang="en-US" sz="2000" dirty="0"/>
+              <a:t>外部電源遮断時</a:t>
+            </a:r>
+          </a:p>
+        </p:txBody>
+      </p:sp>
+      <p:cxnSp>
+        <p:nvCxnSpPr>
+          <p:cNvPr id="12" name="直線コネクタ 11">
+            <a:extLst>
+              <a:ext uri="{FF2B5EF4-FFF2-40B4-BE49-F238E27FC236}">
+                <a16:creationId xmlns:a16="http://schemas.microsoft.com/office/drawing/2014/main" id="{1BC3B1C4-0CCC-994A-AA2B-C08A53A86F70}"/>
+              </a:ext>
+            </a:extLst>
+          </p:cNvPr>
+          <p:cNvCxnSpPr>
+            <a:cxnSpLocks/>
+          </p:cNvCxnSpPr>
+          <p:nvPr/>
+        </p:nvCxnSpPr>
+        <p:spPr>
+          <a:xfrm>
+            <a:off x="1150620" y="1250424"/>
+            <a:ext cx="1973580" cy="0"/>
+          </a:xfrm>
+          <a:prstGeom prst="line">
+            <a:avLst/>
+          </a:prstGeom>
+          <a:ln w="38100"/>
+        </p:spPr>
+        <p:style>
+          <a:lnRef idx="2">
+            <a:schemeClr val="accent6"/>
+          </a:lnRef>
+          <a:fillRef idx="0">
+            <a:schemeClr val="accent6"/>
+          </a:fillRef>
+          <a:effectRef idx="1">
+            <a:schemeClr val="accent6"/>
+          </a:effectRef>
+          <a:fontRef idx="minor">
+            <a:schemeClr val="tx1"/>
+          </a:fontRef>
+        </p:style>
+      </p:cxnSp>
+      <p:cxnSp>
+        <p:nvCxnSpPr>
+          <p:cNvPr id="13" name="直線コネクタ 12">
+            <a:extLst>
+              <a:ext uri="{FF2B5EF4-FFF2-40B4-BE49-F238E27FC236}">
+                <a16:creationId xmlns:a16="http://schemas.microsoft.com/office/drawing/2014/main" id="{94BFC5DA-9A45-4925-46D7-F9219B09E91A}"/>
+              </a:ext>
+            </a:extLst>
+          </p:cNvPr>
+          <p:cNvCxnSpPr>
+            <a:cxnSpLocks/>
+          </p:cNvCxnSpPr>
+          <p:nvPr/>
+        </p:nvCxnSpPr>
+        <p:spPr>
+          <a:xfrm>
+            <a:off x="1150620" y="1317099"/>
+            <a:ext cx="1973580" cy="0"/>
+          </a:xfrm>
+          <a:prstGeom prst="line">
+            <a:avLst/>
+          </a:prstGeom>
+          <a:ln w="38100"/>
+        </p:spPr>
+        <p:style>
+          <a:lnRef idx="2">
+            <a:schemeClr val="accent6"/>
+          </a:lnRef>
+          <a:fillRef idx="0">
+            <a:schemeClr val="accent6"/>
+          </a:fillRef>
+          <a:effectRef idx="1">
+            <a:schemeClr val="accent6"/>
+          </a:effectRef>
+          <a:fontRef idx="minor">
+            <a:schemeClr val="tx1"/>
+          </a:fontRef>
+        </p:style>
+      </p:cxnSp>
+      <p:sp>
+        <p:nvSpPr>
+          <p:cNvPr id="21" name="矢印: 右 20">
+            <a:extLst>
+              <a:ext uri="{FF2B5EF4-FFF2-40B4-BE49-F238E27FC236}">
+                <a16:creationId xmlns:a16="http://schemas.microsoft.com/office/drawing/2014/main" id="{4A2AF1A3-1764-C40C-F35D-6D86285C708B}"/>
+              </a:ext>
+            </a:extLst>
+          </p:cNvPr>
+          <p:cNvSpPr/>
+          <p:nvPr/>
+        </p:nvSpPr>
+        <p:spPr>
+          <a:xfrm rot="16200000">
+            <a:off x="4727973" y="4494877"/>
+            <a:ext cx="1200150" cy="514350"/>
+          </a:xfrm>
+          <a:prstGeom prst="rightArrow">
+            <a:avLst/>
+          </a:prstGeom>
+          <a:solidFill>
+            <a:srgbClr val="00B0F0"/>
+          </a:solidFill>
+          <a:ln>
+            <a:solidFill>
+              <a:schemeClr val="tx1"/>
+            </a:solidFill>
+          </a:ln>
+        </p:spPr>
+        <p:style>
+          <a:lnRef idx="2">
+            <a:schemeClr val="accent1">
+              <a:shade val="15000"/>
+            </a:schemeClr>
+          </a:lnRef>
+          <a:fillRef idx="1">
+            <a:schemeClr val="accent1"/>
+          </a:fillRef>
+          <a:effectRef idx="0">
+            <a:schemeClr val="accent1"/>
+          </a:effectRef>
+          <a:fontRef idx="minor">
+            <a:schemeClr val="lt1"/>
+          </a:fontRef>
+        </p:style>
+        <p:txBody>
+          <a:bodyPr rtlCol="0" anchor="ctr"/>
+          <a:lstStyle/>
+          <a:p>
+            <a:pPr algn="ctr"/>
+            <a:endParaRPr kumimoji="1" lang="ja-JP" altLang="en-US"/>
+          </a:p>
+        </p:txBody>
+      </p:sp>
+      <p:sp>
+        <p:nvSpPr>
+          <p:cNvPr id="40" name="テキスト ボックス 39">
+            <a:extLst>
+              <a:ext uri="{FF2B5EF4-FFF2-40B4-BE49-F238E27FC236}">
+                <a16:creationId xmlns:a16="http://schemas.microsoft.com/office/drawing/2014/main" id="{17C53195-B5D0-09B8-492D-BC182E04D1DF}"/>
+              </a:ext>
+            </a:extLst>
+          </p:cNvPr>
+          <p:cNvSpPr txBox="1"/>
+          <p:nvPr/>
+        </p:nvSpPr>
+        <p:spPr>
+          <a:xfrm>
+            <a:off x="5249055" y="6125119"/>
+            <a:ext cx="1106502" cy="369332"/>
+          </a:xfrm>
+          <a:prstGeom prst="rect">
+            <a:avLst/>
+          </a:prstGeom>
+          <a:noFill/>
+        </p:spPr>
+        <p:txBody>
+          <a:bodyPr wrap="square" rtlCol="0">
+            <a:spAutoFit/>
+          </a:bodyPr>
+          <a:lstStyle/>
+          <a:p>
+            <a:pPr algn="ctr"/>
+            <a:r>
+              <a:rPr lang="en-US" altLang="ja-JP" b="1" dirty="0"/>
+              <a:t>12.8</a:t>
+            </a:r>
+            <a:r>
+              <a:rPr kumimoji="1" lang="en-US" altLang="ja-JP" b="1" dirty="0"/>
+              <a:t> V</a:t>
+            </a:r>
+            <a:endParaRPr kumimoji="1" lang="ja-JP" altLang="en-US" b="1" dirty="0"/>
+          </a:p>
+        </p:txBody>
+      </p:sp>
+    </p:spTree>
+    <p:extLst>
+      <p:ext uri="{BB962C8B-B14F-4D97-AF65-F5344CB8AC3E}">
+        <p14:creationId xmlns:p14="http://schemas.microsoft.com/office/powerpoint/2010/main" val="2167691015"/>
+      </p:ext>
+    </p:extLst>
+  </p:cSld>
+  <p:clrMapOvr>
+    <a:masterClrMapping/>
+  </p:clrMapOvr>
+</p:sld>
+</file>
+
 <file path=ppt/theme/theme1.xml><?xml version="1.0" encoding="utf-8"?>
 <a:theme xmlns:a="http://schemas.openxmlformats.org/drawingml/2006/main" name="Office テーマ">
   <a:themeElements>
